--- a/4/РОП/Практики_1-8/Презентации/РОП_Практическая_7_АлбахтинИВ.pptx
+++ b/4/РОП/Практики_1-8/Презентации/РОП_Практическая_7_АлбахтинИВ.pptx
@@ -2,18 +2,18 @@
 <file path=ppt/presentation.xml><?xml version="1.0" encoding="utf-8"?>
 <p:presentation xmlns:p="http://schemas.openxmlformats.org/presentationml/2006/main">
   <p:sldMasterIdLst>
-    <p:sldMasterId xmlns:r="http://schemas.openxmlformats.org/officeDocument/2006/relationships" id="2147483648" r:id="Rc5740653898f4e98"/>
+    <p:sldMasterId xmlns:r="http://schemas.openxmlformats.org/officeDocument/2006/relationships" id="2147483648" r:id="R3e631f20c6a544a2"/>
   </p:sldMasterIdLst>
   <p:notesMasterIdLst>
-    <p:notesMasterId xmlns:r="http://schemas.openxmlformats.org/officeDocument/2006/relationships" r:id="R464f53d6298b45aa"/>
+    <p:notesMasterId xmlns:r="http://schemas.openxmlformats.org/officeDocument/2006/relationships" r:id="R6339f12275d946cc"/>
   </p:notesMasterIdLst>
   <p:sldIdLst>
-    <p:sldId xmlns:r="http://schemas.openxmlformats.org/officeDocument/2006/relationships" id="256" r:id="R5736363bc1a54003"/>
-    <p:sldId xmlns:r="http://schemas.openxmlformats.org/officeDocument/2006/relationships" id="257" r:id="R283310f0e9394fa8"/>
-    <p:sldId xmlns:r="http://schemas.openxmlformats.org/officeDocument/2006/relationships" id="258" r:id="R7b13e379206e4b62"/>
-    <p:sldId xmlns:r="http://schemas.openxmlformats.org/officeDocument/2006/relationships" id="259" r:id="R729e0e666bb44fad"/>
-    <p:sldId xmlns:r="http://schemas.openxmlformats.org/officeDocument/2006/relationships" id="260" r:id="Rd25aa9101e8c4086"/>
-    <p:sldId xmlns:r="http://schemas.openxmlformats.org/officeDocument/2006/relationships" id="261" r:id="Re78f61b6802e444c"/>
+    <p:sldId xmlns:r="http://schemas.openxmlformats.org/officeDocument/2006/relationships" id="256" r:id="R5ca9102ec35c436c"/>
+    <p:sldId xmlns:r="http://schemas.openxmlformats.org/officeDocument/2006/relationships" id="257" r:id="Rb41a2a18f0524bf8"/>
+    <p:sldId xmlns:r="http://schemas.openxmlformats.org/officeDocument/2006/relationships" id="258" r:id="R37eebe4db6574125"/>
+    <p:sldId xmlns:r="http://schemas.openxmlformats.org/officeDocument/2006/relationships" id="259" r:id="R9734af5719214c99"/>
+    <p:sldId xmlns:r="http://schemas.openxmlformats.org/officeDocument/2006/relationships" id="260" r:id="R4f7e83dd19f8449b"/>
+    <p:sldId xmlns:r="http://schemas.openxmlformats.org/officeDocument/2006/relationships" id="261" r:id="R33dcf002b8a44192"/>
   </p:sldIdLst>
   <p:sldSz cx="12192000" cy="6858000"/>
   <p:notesSz cx="6858000" cy="9144000"/>
@@ -895,7 +895,7 @@
   </p:cSld>
   <p:clrMap bg1="lt1" tx1="dk1" bg2="lt2" tx2="dk2" accent1="accent1" accent2="accent2" accent3="accent3" accent4="accent4" accent5="accent5" accent6="accent6" hlink="hlink" folHlink="folHlink"/>
   <p:sldLayoutIdLst>
-    <p:sldLayoutId xmlns:r="http://schemas.openxmlformats.org/officeDocument/2006/relationships" id="2147483649" r:id="R1537ee7abaed41c2"/>
+    <p:sldLayoutId xmlns:r="http://schemas.openxmlformats.org/officeDocument/2006/relationships" id="2147483649" r:id="R07ffc906abe441cf"/>
   </p:sldLayoutIdLst>
   <p:txStyles>
     <p:titleStyle>
@@ -1446,7 +1446,7 @@
           <p:cNvPr id="5" name="">
             <a:extLst xmlns:a="http://schemas.openxmlformats.org/drawingml/2006/main">
               <a:ext uri="{FF2B5EF4-FFF2-40B4-BE49-F238E27FC236}">
-                <a16:creationId xmlns:a16="http://schemas.microsoft.com/office/drawing/2014/main" id="{37ADB335-08D6-4DE9-AFF3-99869973C296}"/>
+                <a16:creationId xmlns:a16="http://schemas.microsoft.com/office/drawing/2014/main" id="{2ED0D914-8A9A-460A-B04C-0B877E9B87D4}"/>
               </a:ext>
             </a:extLst>
           </p:cNvPr>
@@ -1457,8 +1457,8 @@
         </p:nvSpPr>
         <p:spPr>
           <a:xfrm xmlns:a="http://schemas.openxmlformats.org/drawingml/2006/main">
-            <a:off x="552450" y="333375"/>
-            <a:ext cx="11049000" cy="857250"/>
+            <a:off x="552450" y="266700"/>
+            <a:ext cx="11049000" cy="742950"/>
           </a:xfrm>
           <a:prstGeom xmlns:a="http://schemas.openxmlformats.org/drawingml/2006/main" prst="rect">
             <a:avLst/>
@@ -1469,13 +1469,13 @@
           </a:ln>
         </p:spPr>
         <p:txBody>
-          <a:bodyPr xmlns:a="http://schemas.openxmlformats.org/drawingml/2006/main">
+          <a:bodyPr xmlns:a="http://schemas.openxmlformats.org/drawingml/2006/main" anchor="ctr">
             <a:noAutofit/>
           </a:bodyPr>
           <a:lstStyle xmlns:a="http://schemas.openxmlformats.org/drawingml/2006/main"/>
           <a:p xmlns:a="http://schemas.openxmlformats.org/drawingml/2006/main">
-            <a:pPr>
-              <a:defRPr sz="3150" b="1">
+            <a:pPr algn="l">
+              <a:defRPr sz="2700" b="1">
                 <a:solidFill>
                   <a:srgbClr val="161616"/>
                 </a:solidFill>
@@ -1485,7 +1485,7 @@
               </a:defRPr>
             </a:pPr>
             <a:r>
-              <a:rPr sz="3150" b="1">
+              <a:rPr sz="2700" b="1">
                 <a:solidFill>
                   <a:srgbClr val="161616"/>
                 </a:solidFill>
@@ -1503,7 +1503,7 @@
           <p:cNvPr id="2" name="">
             <a:extLst xmlns:a="http://schemas.openxmlformats.org/drawingml/2006/main">
               <a:ext uri="{FF2B5EF4-FFF2-40B4-BE49-F238E27FC236}">
-                <a16:creationId xmlns:a16="http://schemas.microsoft.com/office/drawing/2014/main" id="{CE225088-C442-4DCE-93F3-1F7D9DB6B7F8}"/>
+                <a16:creationId xmlns:a16="http://schemas.microsoft.com/office/drawing/2014/main" id="{E226F6DF-6493-480C-8EC9-B1EFF0E02B7C}"/>
               </a:ext>
             </a:extLst>
           </p:cNvPr>
@@ -1560,7 +1560,7 @@
           <p:cNvPr id="3" name="">
             <a:extLst xmlns:a="http://schemas.openxmlformats.org/drawingml/2006/main">
               <a:ext uri="{FF2B5EF4-FFF2-40B4-BE49-F238E27FC236}">
-                <a16:creationId xmlns:a16="http://schemas.microsoft.com/office/drawing/2014/main" id="{F81DC80C-648E-4F1E-9F8D-D17CBC99F610}"/>
+                <a16:creationId xmlns:a16="http://schemas.microsoft.com/office/drawing/2014/main" id="{4187F403-4370-473D-B3CB-8DEB229C53C7}"/>
               </a:ext>
             </a:extLst>
           </p:cNvPr>
@@ -1617,7 +1617,7 @@
           <p:cNvPr id="4" name="">
             <a:extLst xmlns:a="http://schemas.openxmlformats.org/drawingml/2006/main">
               <a:ext uri="{FF2B5EF4-FFF2-40B4-BE49-F238E27FC236}">
-                <a16:creationId xmlns:a16="http://schemas.microsoft.com/office/drawing/2014/main" id="{9FD09B37-707D-49E8-A6FC-886A648EC600}"/>
+                <a16:creationId xmlns:a16="http://schemas.microsoft.com/office/drawing/2014/main" id="{6817CDA1-948D-4729-AB84-E3D724530876}"/>
               </a:ext>
             </a:extLst>
           </p:cNvPr>
@@ -1695,7 +1695,7 @@
     </p:spTree>
     <p:extLst>
       <p:ext uri="{BB962C8B-B14F-4D97-AF65-F5344CB8AC3E}">
-        <p14:creationId xmlns:p14="http://schemas.microsoft.com/office/powerpoint/2010/main" val="2007225075"/>
+        <p14:creationId xmlns:p14="http://schemas.microsoft.com/office/powerpoint/2010/main" val="145859455"/>
       </p:ext>
     </p:extLst>
   </p:cSld>
@@ -1726,7 +1726,7 @@
           <p:cNvPr id="3" name="">
             <a:extLst xmlns:a="http://schemas.openxmlformats.org/drawingml/2006/main">
               <a:ext uri="{FF2B5EF4-FFF2-40B4-BE49-F238E27FC236}">
-                <a16:creationId xmlns:a16="http://schemas.microsoft.com/office/drawing/2014/main" id="{3D28B61C-82A7-4D08-8630-31FEAF74714D}"/>
+                <a16:creationId xmlns:a16="http://schemas.microsoft.com/office/drawing/2014/main" id="{070AFB7B-2D24-44EA-815E-B367A5713CF3}"/>
               </a:ext>
             </a:extLst>
           </p:cNvPr>
@@ -1737,8 +1737,8 @@
         </p:nvSpPr>
         <p:spPr>
           <a:xfrm xmlns:a="http://schemas.openxmlformats.org/drawingml/2006/main">
-            <a:off x="552450" y="333375"/>
-            <a:ext cx="11049000" cy="857250"/>
+            <a:off x="552450" y="266700"/>
+            <a:ext cx="11049000" cy="742950"/>
           </a:xfrm>
           <a:prstGeom xmlns:a="http://schemas.openxmlformats.org/drawingml/2006/main" prst="rect">
             <a:avLst/>
@@ -1749,13 +1749,13 @@
           </a:ln>
         </p:spPr>
         <p:txBody>
-          <a:bodyPr xmlns:a="http://schemas.openxmlformats.org/drawingml/2006/main">
+          <a:bodyPr xmlns:a="http://schemas.openxmlformats.org/drawingml/2006/main" anchor="ctr">
             <a:noAutofit/>
           </a:bodyPr>
           <a:lstStyle xmlns:a="http://schemas.openxmlformats.org/drawingml/2006/main"/>
           <a:p xmlns:a="http://schemas.openxmlformats.org/drawingml/2006/main">
-            <a:pPr>
-              <a:defRPr sz="3150" b="1">
+            <a:pPr algn="l">
+              <a:defRPr sz="2700" b="1">
                 <a:solidFill>
                   <a:srgbClr val="161616"/>
                 </a:solidFill>
@@ -1765,7 +1765,7 @@
               </a:defRPr>
             </a:pPr>
             <a:r>
-              <a:rPr sz="3150" b="1">
+              <a:rPr sz="2700" b="1">
                 <a:solidFill>
                   <a:srgbClr val="161616"/>
                 </a:solidFill>
@@ -2248,7 +2248,7 @@
     </p:spTree>
     <p:extLst>
       <p:ext uri="{BB962C8B-B14F-4D97-AF65-F5344CB8AC3E}">
-        <p14:creationId xmlns:p14="http://schemas.microsoft.com/office/powerpoint/2010/main" val="1376879270"/>
+        <p14:creationId xmlns:p14="http://schemas.microsoft.com/office/powerpoint/2010/main" val="363863469"/>
       </p:ext>
     </p:extLst>
   </p:cSld>
@@ -2279,7 +2279,7 @@
           <p:cNvPr id="10" name="">
             <a:extLst xmlns:a="http://schemas.openxmlformats.org/drawingml/2006/main">
               <a:ext uri="{FF2B5EF4-FFF2-40B4-BE49-F238E27FC236}">
-                <a16:creationId xmlns:a16="http://schemas.microsoft.com/office/drawing/2014/main" id="{1FD9AC52-95A8-45C9-84B0-E42A01F1608F}"/>
+                <a16:creationId xmlns:a16="http://schemas.microsoft.com/office/drawing/2014/main" id="{7B4824F1-1A26-4854-9D71-35E1E2CA6063}"/>
               </a:ext>
             </a:extLst>
           </p:cNvPr>
@@ -2290,8 +2290,8 @@
         </p:nvSpPr>
         <p:spPr>
           <a:xfrm xmlns:a="http://schemas.openxmlformats.org/drawingml/2006/main">
-            <a:off x="552450" y="333375"/>
-            <a:ext cx="11049000" cy="857250"/>
+            <a:off x="552450" y="266700"/>
+            <a:ext cx="11049000" cy="742950"/>
           </a:xfrm>
           <a:prstGeom xmlns:a="http://schemas.openxmlformats.org/drawingml/2006/main" prst="rect">
             <a:avLst/>
@@ -2302,13 +2302,13 @@
           </a:ln>
         </p:spPr>
         <p:txBody>
-          <a:bodyPr xmlns:a="http://schemas.openxmlformats.org/drawingml/2006/main">
+          <a:bodyPr xmlns:a="http://schemas.openxmlformats.org/drawingml/2006/main" anchor="ctr">
             <a:noAutofit/>
           </a:bodyPr>
           <a:lstStyle xmlns:a="http://schemas.openxmlformats.org/drawingml/2006/main"/>
           <a:p xmlns:a="http://schemas.openxmlformats.org/drawingml/2006/main">
-            <a:pPr>
-              <a:defRPr sz="3150" b="1">
+            <a:pPr algn="l">
+              <a:defRPr sz="2700" b="1">
                 <a:solidFill>
                   <a:srgbClr val="161616"/>
                 </a:solidFill>
@@ -2318,7 +2318,7 @@
               </a:defRPr>
             </a:pPr>
             <a:r>
-              <a:rPr sz="3150" b="1">
+              <a:rPr sz="2700" b="1">
                 <a:solidFill>
                   <a:srgbClr val="161616"/>
                 </a:solidFill>
@@ -2336,7 +2336,7 @@
           <p:cNvPr id="2" name="">
             <a:extLst xmlns:a="http://schemas.openxmlformats.org/drawingml/2006/main">
               <a:ext uri="{FF2B5EF4-FFF2-40B4-BE49-F238E27FC236}">
-                <a16:creationId xmlns:a16="http://schemas.microsoft.com/office/drawing/2014/main" id="{D74CAAB0-9A14-4F62-8F11-FED47C5A4C65}"/>
+                <a16:creationId xmlns:a16="http://schemas.microsoft.com/office/drawing/2014/main" id="{79BB76D1-C1C7-4C9E-AE8C-D72EFBEE881E}"/>
               </a:ext>
             </a:extLst>
           </p:cNvPr>
@@ -2387,7 +2387,7 @@
                 <a:ea typeface="Arial"/>
                 <a:cs typeface="Arial"/>
               </a:rPr>
-              <a:t>bom</a:t>
+              <a:t>model_line</a:t>
             </a:r>
           </a:p>
         </p:txBody>
@@ -2397,7 +2397,7 @@
           <p:cNvPr id="3" name="">
             <a:extLst xmlns:a="http://schemas.openxmlformats.org/drawingml/2006/main">
               <a:ext uri="{FF2B5EF4-FFF2-40B4-BE49-F238E27FC236}">
-                <a16:creationId xmlns:a16="http://schemas.microsoft.com/office/drawing/2014/main" id="{8D30E8FA-2662-465B-AE0B-79F0FF60B2CC}"/>
+                <a16:creationId xmlns:a16="http://schemas.microsoft.com/office/drawing/2014/main" id="{2F95B07F-0D38-44BD-94BC-B46A9F2374A1}"/>
               </a:ext>
             </a:extLst>
           </p:cNvPr>
@@ -2427,7 +2427,7 @@
           <p:cNvPr id="4" name="">
             <a:extLst xmlns:a="http://schemas.openxmlformats.org/drawingml/2006/main">
               <a:ext uri="{FF2B5EF4-FFF2-40B4-BE49-F238E27FC236}">
-                <a16:creationId xmlns:a16="http://schemas.microsoft.com/office/drawing/2014/main" id="{1F694148-E0AC-40E7-8F17-873D65802CE4}"/>
+                <a16:creationId xmlns:a16="http://schemas.microsoft.com/office/drawing/2014/main" id="{E78460AD-BF9F-4C2D-B495-936A9ED3C13A}"/>
               </a:ext>
             </a:extLst>
           </p:cNvPr>
@@ -2478,7 +2478,7 @@
                 <a:ea typeface="Arial"/>
                 <a:cs typeface="Arial"/>
               </a:rPr>
-              <a:t>bom_version</a:t>
+              <a:t>model_line_version</a:t>
             </a:r>
           </a:p>
         </p:txBody>
@@ -2488,7 +2488,7 @@
           <p:cNvPr id="5" name="">
             <a:extLst xmlns:a="http://schemas.openxmlformats.org/drawingml/2006/main">
               <a:ext uri="{FF2B5EF4-FFF2-40B4-BE49-F238E27FC236}">
-                <a16:creationId xmlns:a16="http://schemas.microsoft.com/office/drawing/2014/main" id="{78AF437A-23F0-4CAD-BEB3-14964292AA19}"/>
+                <a16:creationId xmlns:a16="http://schemas.microsoft.com/office/drawing/2014/main" id="{62C58C7C-A3F4-45A1-95C9-5F03B64533B4}"/>
               </a:ext>
             </a:extLst>
           </p:cNvPr>
@@ -2518,7 +2518,7 @@
           <p:cNvPr id="6" name="">
             <a:extLst xmlns:a="http://schemas.openxmlformats.org/drawingml/2006/main">
               <a:ext uri="{FF2B5EF4-FFF2-40B4-BE49-F238E27FC236}">
-                <a16:creationId xmlns:a16="http://schemas.microsoft.com/office/drawing/2014/main" id="{00148443-C66B-417C-A2CE-E98E4B5A9AE7}"/>
+                <a16:creationId xmlns:a16="http://schemas.microsoft.com/office/drawing/2014/main" id="{C6B74413-1D95-4157-A75B-9ABC7303D4A8}"/>
               </a:ext>
             </a:extLst>
           </p:cNvPr>
@@ -2569,7 +2569,7 @@
                 <a:ea typeface="Arial"/>
                 <a:cs typeface="Arial"/>
               </a:rPr>
-              <a:t>bom_slot</a:t>
+              <a:t>model_line_slot</a:t>
             </a:r>
           </a:p>
         </p:txBody>
@@ -2579,7 +2579,7 @@
           <p:cNvPr id="7" name="">
             <a:extLst xmlns:a="http://schemas.openxmlformats.org/drawingml/2006/main">
               <a:ext uri="{FF2B5EF4-FFF2-40B4-BE49-F238E27FC236}">
-                <a16:creationId xmlns:a16="http://schemas.microsoft.com/office/drawing/2014/main" id="{E5984399-7505-48D8-9CCA-B2FD9EE6F10E}"/>
+                <a16:creationId xmlns:a16="http://schemas.microsoft.com/office/drawing/2014/main" id="{51EF3EB4-1FCC-4120-9AAE-55DE9B5DDE7B}"/>
               </a:ext>
             </a:extLst>
           </p:cNvPr>
@@ -2609,7 +2609,7 @@
           <p:cNvPr id="8" name="">
             <a:extLst xmlns:a="http://schemas.openxmlformats.org/drawingml/2006/main">
               <a:ext uri="{FF2B5EF4-FFF2-40B4-BE49-F238E27FC236}">
-                <a16:creationId xmlns:a16="http://schemas.microsoft.com/office/drawing/2014/main" id="{10DB7AAA-ABAE-4153-ABA8-87893526704F}"/>
+                <a16:creationId xmlns:a16="http://schemas.microsoft.com/office/drawing/2014/main" id="{0D9B6F15-F9B2-413B-9821-490ABC023A23}"/>
               </a:ext>
             </a:extLst>
           </p:cNvPr>
@@ -2670,7 +2670,7 @@
           <p:cNvPr id="9" name="">
             <a:extLst xmlns:a="http://schemas.openxmlformats.org/drawingml/2006/main">
               <a:ext uri="{FF2B5EF4-FFF2-40B4-BE49-F238E27FC236}">
-                <a16:creationId xmlns:a16="http://schemas.microsoft.com/office/drawing/2014/main" id="{F58C1100-8EED-45BF-AC14-59DC3AC5B84C}"/>
+                <a16:creationId xmlns:a16="http://schemas.microsoft.com/office/drawing/2014/main" id="{FF0F589F-24EA-4D2A-9EEA-AC81D523223E}"/>
               </a:ext>
             </a:extLst>
           </p:cNvPr>
@@ -2725,7 +2725,7 @@
     </p:spTree>
     <p:extLst>
       <p:ext uri="{BB962C8B-B14F-4D97-AF65-F5344CB8AC3E}">
-        <p14:creationId xmlns:p14="http://schemas.microsoft.com/office/powerpoint/2010/main" val="7948875"/>
+        <p14:creationId xmlns:p14="http://schemas.microsoft.com/office/powerpoint/2010/main" val="1155258547"/>
       </p:ext>
     </p:extLst>
   </p:cSld>
@@ -2756,7 +2756,7 @@
           <p:cNvPr id="3" name="">
             <a:extLst xmlns:a="http://schemas.openxmlformats.org/drawingml/2006/main">
               <a:ext uri="{FF2B5EF4-FFF2-40B4-BE49-F238E27FC236}">
-                <a16:creationId xmlns:a16="http://schemas.microsoft.com/office/drawing/2014/main" id="{3BEE2827-4FEE-4207-9863-B45AF337467C}"/>
+                <a16:creationId xmlns:a16="http://schemas.microsoft.com/office/drawing/2014/main" id="{26C5F3A1-15CE-45C6-A007-52668167FD96}"/>
               </a:ext>
             </a:extLst>
           </p:cNvPr>
@@ -2767,8 +2767,8 @@
         </p:nvSpPr>
         <p:spPr>
           <a:xfrm xmlns:a="http://schemas.openxmlformats.org/drawingml/2006/main">
-            <a:off x="552450" y="333375"/>
-            <a:ext cx="11049000" cy="857250"/>
+            <a:off x="552450" y="266700"/>
+            <a:ext cx="11049000" cy="742950"/>
           </a:xfrm>
           <a:prstGeom xmlns:a="http://schemas.openxmlformats.org/drawingml/2006/main" prst="rect">
             <a:avLst/>
@@ -2779,13 +2779,13 @@
           </a:ln>
         </p:spPr>
         <p:txBody>
-          <a:bodyPr xmlns:a="http://schemas.openxmlformats.org/drawingml/2006/main">
+          <a:bodyPr xmlns:a="http://schemas.openxmlformats.org/drawingml/2006/main" anchor="ctr">
             <a:noAutofit/>
           </a:bodyPr>
           <a:lstStyle xmlns:a="http://schemas.openxmlformats.org/drawingml/2006/main"/>
           <a:p xmlns:a="http://schemas.openxmlformats.org/drawingml/2006/main">
-            <a:pPr>
-              <a:defRPr sz="3150" b="1">
+            <a:pPr algn="l">
+              <a:defRPr sz="2700" b="1">
                 <a:solidFill>
                   <a:srgbClr val="161616"/>
                 </a:solidFill>
@@ -2795,7 +2795,7 @@
               </a:defRPr>
             </a:pPr>
             <a:r>
-              <a:rPr sz="3150" b="1">
+              <a:rPr sz="2700" b="1">
                 <a:solidFill>
                   <a:srgbClr val="161616"/>
                 </a:solidFill>
@@ -3133,7 +3133,7 @@
     </p:spTree>
     <p:extLst>
       <p:ext uri="{BB962C8B-B14F-4D97-AF65-F5344CB8AC3E}">
-        <p14:creationId xmlns:p14="http://schemas.microsoft.com/office/powerpoint/2010/main" val="1608095770"/>
+        <p14:creationId xmlns:p14="http://schemas.microsoft.com/office/powerpoint/2010/main" val="1606599708"/>
       </p:ext>
     </p:extLst>
   </p:cSld>
@@ -3164,7 +3164,7 @@
           <p:cNvPr id="3" name="">
             <a:extLst xmlns:a="http://schemas.openxmlformats.org/drawingml/2006/main">
               <a:ext uri="{FF2B5EF4-FFF2-40B4-BE49-F238E27FC236}">
-                <a16:creationId xmlns:a16="http://schemas.microsoft.com/office/drawing/2014/main" id="{E54BCC60-6ECA-4393-96ED-1C899BAEBA31}"/>
+                <a16:creationId xmlns:a16="http://schemas.microsoft.com/office/drawing/2014/main" id="{2707CE2E-C769-4673-ADFF-2D9A6CF04424}"/>
               </a:ext>
             </a:extLst>
           </p:cNvPr>
@@ -3175,8 +3175,8 @@
         </p:nvSpPr>
         <p:spPr>
           <a:xfrm xmlns:a="http://schemas.openxmlformats.org/drawingml/2006/main">
-            <a:off x="552450" y="333375"/>
-            <a:ext cx="11049000" cy="857250"/>
+            <a:off x="552450" y="266700"/>
+            <a:ext cx="11049000" cy="742950"/>
           </a:xfrm>
           <a:prstGeom xmlns:a="http://schemas.openxmlformats.org/drawingml/2006/main" prst="rect">
             <a:avLst/>
@@ -3187,13 +3187,13 @@
           </a:ln>
         </p:spPr>
         <p:txBody>
-          <a:bodyPr xmlns:a="http://schemas.openxmlformats.org/drawingml/2006/main">
+          <a:bodyPr xmlns:a="http://schemas.openxmlformats.org/drawingml/2006/main" anchor="ctr">
             <a:noAutofit/>
           </a:bodyPr>
           <a:lstStyle xmlns:a="http://schemas.openxmlformats.org/drawingml/2006/main"/>
           <a:p xmlns:a="http://schemas.openxmlformats.org/drawingml/2006/main">
-            <a:pPr>
-              <a:defRPr sz="3150" b="1">
+            <a:pPr algn="l">
+              <a:defRPr sz="2700" b="1">
                 <a:solidFill>
                   <a:srgbClr val="161616"/>
                 </a:solidFill>
@@ -3203,7 +3203,7 @@
               </a:defRPr>
             </a:pPr>
             <a:r>
-              <a:rPr sz="3150" b="1">
+              <a:rPr sz="2700" b="1">
                 <a:solidFill>
                   <a:srgbClr val="161616"/>
                 </a:solidFill>
@@ -3225,13 +3225,13 @@
           <p:nvPr/>
         </p:nvPicPr>
         <p:blipFill>
-          <a:blip xmlns:r="http://schemas.openxmlformats.org/officeDocument/2006/relationships" xmlns:a="http://schemas.openxmlformats.org/drawingml/2006/main" r:embed="R45f97e0ef44b485d"/>
+          <a:blip xmlns:r="http://schemas.openxmlformats.org/officeDocument/2006/relationships" xmlns:a="http://schemas.openxmlformats.org/drawingml/2006/main" r:embed="Rb5a0918cca6241bc"/>
           <a:stretch xmlns:a="http://schemas.openxmlformats.org/drawingml/2006/main"/>
         </p:blipFill>
         <p:spPr>
           <a:xfrm xmlns:a="http://schemas.openxmlformats.org/drawingml/2006/main">
-            <a:off x="2307648" y="1285875"/>
-            <a:ext cx="7576705" cy="5000625"/>
+            <a:off x="1935417" y="1285875"/>
+            <a:ext cx="8321167" cy="5000625"/>
           </a:xfrm>
           <a:prstGeom xmlns:a="http://schemas.openxmlformats.org/drawingml/2006/main" prst="rect">
             <a:avLst/>
@@ -3241,7 +3241,7 @@
     </p:spTree>
     <p:extLst>
       <p:ext uri="{BB962C8B-B14F-4D97-AF65-F5344CB8AC3E}">
-        <p14:creationId xmlns:p14="http://schemas.microsoft.com/office/powerpoint/2010/main" val="1897200220"/>
+        <p14:creationId xmlns:p14="http://schemas.microsoft.com/office/powerpoint/2010/main" val="1376011665"/>
       </p:ext>
     </p:extLst>
   </p:cSld>
@@ -3272,7 +3272,7 @@
           <p:cNvPr id="6" name="">
             <a:extLst xmlns:a="http://schemas.openxmlformats.org/drawingml/2006/main">
               <a:ext uri="{FF2B5EF4-FFF2-40B4-BE49-F238E27FC236}">
-                <a16:creationId xmlns:a16="http://schemas.microsoft.com/office/drawing/2014/main" id="{A8C7217A-6B19-4452-9006-600D16DDBE58}"/>
+                <a16:creationId xmlns:a16="http://schemas.microsoft.com/office/drawing/2014/main" id="{E049D8F5-FAC8-4D4D-A72A-2E2BBC8B9DEA}"/>
               </a:ext>
             </a:extLst>
           </p:cNvPr>
@@ -3283,8 +3283,8 @@
         </p:nvSpPr>
         <p:spPr>
           <a:xfrm xmlns:a="http://schemas.openxmlformats.org/drawingml/2006/main">
-            <a:off x="552450" y="333375"/>
-            <a:ext cx="11049000" cy="857250"/>
+            <a:off x="552450" y="266700"/>
+            <a:ext cx="11049000" cy="742950"/>
           </a:xfrm>
           <a:prstGeom xmlns:a="http://schemas.openxmlformats.org/drawingml/2006/main" prst="rect">
             <a:avLst/>
@@ -3295,13 +3295,13 @@
           </a:ln>
         </p:spPr>
         <p:txBody>
-          <a:bodyPr xmlns:a="http://schemas.openxmlformats.org/drawingml/2006/main">
+          <a:bodyPr xmlns:a="http://schemas.openxmlformats.org/drawingml/2006/main" anchor="ctr">
             <a:noAutofit/>
           </a:bodyPr>
           <a:lstStyle xmlns:a="http://schemas.openxmlformats.org/drawingml/2006/main"/>
           <a:p xmlns:a="http://schemas.openxmlformats.org/drawingml/2006/main">
-            <a:pPr>
-              <a:defRPr sz="3150" b="1">
+            <a:pPr algn="l">
+              <a:defRPr sz="2700" b="1">
                 <a:solidFill>
                   <a:srgbClr val="161616"/>
                 </a:solidFill>
@@ -3311,7 +3311,7 @@
               </a:defRPr>
             </a:pPr>
             <a:r>
-              <a:rPr sz="3150" b="1">
+              <a:rPr sz="2700" b="1">
                 <a:solidFill>
                   <a:srgbClr val="161616"/>
                 </a:solidFill>
@@ -3329,7 +3329,7 @@
           <p:cNvPr id="2" name="">
             <a:extLst xmlns:a="http://schemas.openxmlformats.org/drawingml/2006/main">
               <a:ext uri="{FF2B5EF4-FFF2-40B4-BE49-F238E27FC236}">
-                <a16:creationId xmlns:a16="http://schemas.microsoft.com/office/drawing/2014/main" id="{4DAB3DE2-59E2-4E08-AE3A-72C5134F9CB3}"/>
+                <a16:creationId xmlns:a16="http://schemas.microsoft.com/office/drawing/2014/main" id="{373BD44D-1613-4F67-A521-1B786A44C72B}"/>
               </a:ext>
             </a:extLst>
           </p:cNvPr>
@@ -3386,7 +3386,7 @@
           <p:cNvPr id="3" name="">
             <a:extLst xmlns:a="http://schemas.openxmlformats.org/drawingml/2006/main">
               <a:ext uri="{FF2B5EF4-FFF2-40B4-BE49-F238E27FC236}">
-                <a16:creationId xmlns:a16="http://schemas.microsoft.com/office/drawing/2014/main" id="{4359D2B2-404C-4999-8C5B-512B9194F4CA}"/>
+                <a16:creationId xmlns:a16="http://schemas.microsoft.com/office/drawing/2014/main" id="{D9864804-8E3D-4D07-8D06-20273BC4A751}"/>
               </a:ext>
             </a:extLst>
           </p:cNvPr>
@@ -3443,7 +3443,7 @@
           <p:cNvPr id="4" name="">
             <a:extLst xmlns:a="http://schemas.openxmlformats.org/drawingml/2006/main">
               <a:ext uri="{FF2B5EF4-FFF2-40B4-BE49-F238E27FC236}">
-                <a16:creationId xmlns:a16="http://schemas.microsoft.com/office/drawing/2014/main" id="{20C9AC76-4AA2-4868-A897-8D8C6C9B4E70}"/>
+                <a16:creationId xmlns:a16="http://schemas.microsoft.com/office/drawing/2014/main" id="{859A0FBA-D5E7-4B82-82FD-567132A0379E}"/>
               </a:ext>
             </a:extLst>
           </p:cNvPr>
@@ -3500,7 +3500,7 @@
           <p:cNvPr id="5" name="">
             <a:extLst xmlns:a="http://schemas.openxmlformats.org/drawingml/2006/main">
               <a:ext uri="{FF2B5EF4-FFF2-40B4-BE49-F238E27FC236}">
-                <a16:creationId xmlns:a16="http://schemas.microsoft.com/office/drawing/2014/main" id="{CD38F7C0-807A-4F13-865F-B05F0CF1F911}"/>
+                <a16:creationId xmlns:a16="http://schemas.microsoft.com/office/drawing/2014/main" id="{C8B0CCD3-0F34-4AC9-8669-56470CC0E448}"/>
               </a:ext>
             </a:extLst>
           </p:cNvPr>
@@ -3555,7 +3555,7 @@
     </p:spTree>
     <p:extLst>
       <p:ext uri="{BB962C8B-B14F-4D97-AF65-F5344CB8AC3E}">
-        <p14:creationId xmlns:p14="http://schemas.microsoft.com/office/powerpoint/2010/main" val="251665219"/>
+        <p14:creationId xmlns:p14="http://schemas.microsoft.com/office/powerpoint/2010/main" val="2105855199"/>
       </p:ext>
     </p:extLst>
   </p:cSld>

--- a/4/РОП/Практики_1-8/Презентации/РОП_Практическая_7_АлбахтинИВ.pptx
+++ b/4/РОП/Практики_1-8/Презентации/РОП_Практическая_7_АлбахтинИВ.pptx
@@ -2,18 +2,18 @@
 <file path=ppt/presentation.xml><?xml version="1.0" encoding="utf-8"?>
 <p:presentation xmlns:p="http://schemas.openxmlformats.org/presentationml/2006/main">
   <p:sldMasterIdLst>
-    <p:sldMasterId xmlns:r="http://schemas.openxmlformats.org/officeDocument/2006/relationships" id="2147483648" r:id="R3e631f20c6a544a2"/>
+    <p:sldMasterId xmlns:r="http://schemas.openxmlformats.org/officeDocument/2006/relationships" id="2147483648" r:id="Ra4c3ac76c11d40e3"/>
   </p:sldMasterIdLst>
   <p:notesMasterIdLst>
-    <p:notesMasterId xmlns:r="http://schemas.openxmlformats.org/officeDocument/2006/relationships" r:id="R6339f12275d946cc"/>
+    <p:notesMasterId xmlns:r="http://schemas.openxmlformats.org/officeDocument/2006/relationships" r:id="R37794be50fa74228"/>
   </p:notesMasterIdLst>
   <p:sldIdLst>
-    <p:sldId xmlns:r="http://schemas.openxmlformats.org/officeDocument/2006/relationships" id="256" r:id="R5ca9102ec35c436c"/>
-    <p:sldId xmlns:r="http://schemas.openxmlformats.org/officeDocument/2006/relationships" id="257" r:id="Rb41a2a18f0524bf8"/>
-    <p:sldId xmlns:r="http://schemas.openxmlformats.org/officeDocument/2006/relationships" id="258" r:id="R37eebe4db6574125"/>
-    <p:sldId xmlns:r="http://schemas.openxmlformats.org/officeDocument/2006/relationships" id="259" r:id="R9734af5719214c99"/>
-    <p:sldId xmlns:r="http://schemas.openxmlformats.org/officeDocument/2006/relationships" id="260" r:id="R4f7e83dd19f8449b"/>
-    <p:sldId xmlns:r="http://schemas.openxmlformats.org/officeDocument/2006/relationships" id="261" r:id="R33dcf002b8a44192"/>
+    <p:sldId xmlns:r="http://schemas.openxmlformats.org/officeDocument/2006/relationships" id="256" r:id="R8e75dd130b1b43fd"/>
+    <p:sldId xmlns:r="http://schemas.openxmlformats.org/officeDocument/2006/relationships" id="257" r:id="Rdfc779e7afc94865"/>
+    <p:sldId xmlns:r="http://schemas.openxmlformats.org/officeDocument/2006/relationships" id="258" r:id="R3ccca1699d824ee2"/>
+    <p:sldId xmlns:r="http://schemas.openxmlformats.org/officeDocument/2006/relationships" id="259" r:id="Rfdd6ee686fcd467c"/>
+    <p:sldId xmlns:r="http://schemas.openxmlformats.org/officeDocument/2006/relationships" id="260" r:id="R3ffff1d98d4a4dbf"/>
+    <p:sldId xmlns:r="http://schemas.openxmlformats.org/officeDocument/2006/relationships" id="261" r:id="Ra18a871eedea411d"/>
   </p:sldIdLst>
   <p:sldSz cx="12192000" cy="6858000"/>
   <p:notesSz cx="6858000" cy="9144000"/>
@@ -203,16 +203,16 @@
         <a:srgbClr val="96607D"/>
       </a:folHlink>
     </a:clrScheme>
-    <a:fontScheme name="Office">
+    <a:fontScheme name="">
       <a:majorFont>
-        <a:latin typeface="Calibri Light"/>
-        <a:ea typeface="Calibri Light"/>
-        <a:cs typeface="Calibri Light"/>
+        <a:latin typeface="Aptos"/>
+        <a:ea typeface=""/>
+        <a:cs typeface=""/>
       </a:majorFont>
       <a:minorFont>
-        <a:latin typeface="Calibri"/>
-        <a:ea typeface="Calibri"/>
-        <a:cs typeface="Calibri"/>
+        <a:latin typeface="Aptos"/>
+        <a:ea typeface=""/>
+        <a:cs typeface=""/>
       </a:minorFont>
     </a:fontScheme>
     <a:fmtScheme name="ChatGPT">
@@ -869,6 +869,1661 @@
       <p:grpSpPr>
         <a:xfrm xmlns:a="http://schemas.openxmlformats.org/drawingml/2006/main"/>
       </p:grpSpPr>
+      <p:sp>
+        <p:nvSpPr>
+          <p:cNvPr id="3" name="Title">
+            <a:extLst xmlns:a="http://schemas.openxmlformats.org/drawingml/2006/main">
+              <a:ext uri="{FF2B5EF4-FFF2-40B4-BE49-F238E27FC236}">
+                <a16:creationId xmlns:a16="http://schemas.microsoft.com/office/drawing/2014/main" id="{1F5ACD4C-1474-4C4E-BE7E-C90B1217201C}"/>
+              </a:ext>
+            </a:extLst>
+          </p:cNvPr>
+          <p:cNvSpPr>
+            <a:spLocks xmlns:a="http://schemas.openxmlformats.org/drawingml/2006/main" noGrp="1"/>
+          </p:cNvSpPr>
+          <p:nvPr>
+            <p:ph type="title" idx="0"/>
+          </p:nvPr>
+        </p:nvSpPr>
+        <p:spPr>
+          <a:xfrm xmlns:a="http://schemas.openxmlformats.org/drawingml/2006/main">
+            <a:off x="1219200" y="2590800"/>
+            <a:ext cx="9753600" cy="990600"/>
+          </a:xfrm>
+          <a:prstGeom xmlns:a="http://schemas.openxmlformats.org/drawingml/2006/main" prst="rect">
+            <a:avLst/>
+          </a:prstGeom>
+          <a:noFill xmlns:a="http://schemas.openxmlformats.org/drawingml/2006/main"/>
+          <a:ln xmlns:a="http://schemas.openxmlformats.org/drawingml/2006/main">
+            <a:noFill/>
+            <a:prstDash val="solid"/>
+          </a:ln>
+        </p:spPr>
+        <p:txBody>
+          <a:bodyPr xmlns:a="http://schemas.openxmlformats.org/drawingml/2006/main" wrap="square" lIns="0" tIns="0" rIns="0" bIns="0" anchor="ctr">
+            <a:normAutofit/>
+          </a:bodyPr>
+          <a:lstStyle xmlns:a="http://schemas.openxmlformats.org/drawingml/2006/main">
+            <a:defPPr algn="ctr">
+              <a:defRPr sz="4800" b="1">
+                <a:solidFill>
+                  <a:schemeClr val="tx1"/>
+                </a:solidFill>
+                <a:latin typeface="+mj-lt"/>
+                <a:ea typeface="+mj-lt"/>
+                <a:cs typeface="+mj-lt"/>
+              </a:defRPr>
+            </a:defPPr>
+            <a:lvl1pPr marL="0" indent="0">
+              <a:lnSpc>
+                <a:spcPct val="110000"/>
+              </a:lnSpc>
+              <a:spcBef>
+                <a:spcPts val="0"/>
+              </a:spcBef>
+              <a:spcAft>
+                <a:spcPts val="0"/>
+              </a:spcAft>
+              <a:buNone/>
+            </a:lvl1pPr>
+            <a:lvl2pPr marL="0" indent="0">
+              <a:lnSpc>
+                <a:spcPct val="110000"/>
+              </a:lnSpc>
+              <a:spcBef>
+                <a:spcPts val="0"/>
+              </a:spcBef>
+              <a:spcAft>
+                <a:spcPts val="0"/>
+              </a:spcAft>
+              <a:buNone/>
+            </a:lvl2pPr>
+            <a:lvl3pPr marL="0" indent="0">
+              <a:lnSpc>
+                <a:spcPct val="110000"/>
+              </a:lnSpc>
+              <a:spcBef>
+                <a:spcPts val="0"/>
+              </a:spcBef>
+              <a:spcAft>
+                <a:spcPts val="0"/>
+              </a:spcAft>
+              <a:buNone/>
+            </a:lvl3pPr>
+            <a:lvl4pPr marL="0" indent="0">
+              <a:lnSpc>
+                <a:spcPct val="110000"/>
+              </a:lnSpc>
+              <a:spcBef>
+                <a:spcPts val="0"/>
+              </a:spcBef>
+              <a:spcAft>
+                <a:spcPts val="0"/>
+              </a:spcAft>
+              <a:buNone/>
+            </a:lvl4pPr>
+            <a:lvl5pPr marL="0" indent="0">
+              <a:lnSpc>
+                <a:spcPct val="110000"/>
+              </a:lnSpc>
+              <a:spcBef>
+                <a:spcPts val="0"/>
+              </a:spcBef>
+              <a:spcAft>
+                <a:spcPts val="0"/>
+              </a:spcAft>
+              <a:buNone/>
+            </a:lvl5pPr>
+            <a:lvl6pPr marL="0" indent="0">
+              <a:lnSpc>
+                <a:spcPct val="110000"/>
+              </a:lnSpc>
+              <a:spcBef>
+                <a:spcPts val="0"/>
+              </a:spcBef>
+              <a:spcAft>
+                <a:spcPts val="0"/>
+              </a:spcAft>
+              <a:buNone/>
+            </a:lvl6pPr>
+            <a:lvl7pPr marL="0" indent="0">
+              <a:lnSpc>
+                <a:spcPct val="110000"/>
+              </a:lnSpc>
+              <a:spcBef>
+                <a:spcPts val="0"/>
+              </a:spcBef>
+              <a:spcAft>
+                <a:spcPts val="0"/>
+              </a:spcAft>
+              <a:buNone/>
+            </a:lvl7pPr>
+            <a:lvl8pPr marL="0" indent="0">
+              <a:lnSpc>
+                <a:spcPct val="110000"/>
+              </a:lnSpc>
+              <a:spcBef>
+                <a:spcPts val="0"/>
+              </a:spcBef>
+              <a:spcAft>
+                <a:spcPts val="0"/>
+              </a:spcAft>
+              <a:buNone/>
+            </a:lvl8pPr>
+            <a:lvl9pPr marL="0" indent="0">
+              <a:lnSpc>
+                <a:spcPct val="110000"/>
+              </a:lnSpc>
+              <a:spcBef>
+                <a:spcPts val="0"/>
+              </a:spcBef>
+              <a:spcAft>
+                <a:spcPts val="0"/>
+              </a:spcAft>
+              <a:buNone/>
+            </a:lvl9pPr>
+          </a:lstStyle>
+          <a:p xmlns:a="http://schemas.openxmlformats.org/drawingml/2006/main"/>
+        </p:txBody>
+      </p:sp>
+      <p:sp>
+        <p:nvSpPr>
+          <p:cNvPr id="2" name="Subtitle">
+            <a:extLst xmlns:a="http://schemas.openxmlformats.org/drawingml/2006/main">
+              <a:ext uri="{FF2B5EF4-FFF2-40B4-BE49-F238E27FC236}">
+                <a16:creationId xmlns:a16="http://schemas.microsoft.com/office/drawing/2014/main" id="{2892F529-F34F-44DC-A164-3C52E8A98407}"/>
+              </a:ext>
+            </a:extLst>
+          </p:cNvPr>
+          <p:cNvSpPr>
+            <a:spLocks xmlns:a="http://schemas.openxmlformats.org/drawingml/2006/main" noGrp="1"/>
+          </p:cNvSpPr>
+          <p:nvPr>
+            <p:ph type="subTitle" idx="1"/>
+          </p:nvPr>
+        </p:nvSpPr>
+        <p:spPr>
+          <a:xfrm xmlns:a="http://schemas.openxmlformats.org/drawingml/2006/main">
+            <a:off x="1828800" y="3771900"/>
+            <a:ext cx="8534400" cy="762000"/>
+          </a:xfrm>
+          <a:prstGeom xmlns:a="http://schemas.openxmlformats.org/drawingml/2006/main" prst="rect">
+            <a:avLst/>
+          </a:prstGeom>
+          <a:noFill xmlns:a="http://schemas.openxmlformats.org/drawingml/2006/main"/>
+          <a:ln xmlns:a="http://schemas.openxmlformats.org/drawingml/2006/main">
+            <a:noFill/>
+            <a:prstDash val="solid"/>
+          </a:ln>
+        </p:spPr>
+        <p:txBody>
+          <a:bodyPr xmlns:a="http://schemas.openxmlformats.org/drawingml/2006/main" wrap="square" lIns="0" tIns="0" rIns="0" bIns="0" anchor="ctr">
+            <a:normAutofit/>
+          </a:bodyPr>
+          <a:lstStyle xmlns:a="http://schemas.openxmlformats.org/drawingml/2006/main">
+            <a:defPPr algn="ctr">
+              <a:defRPr sz="2100" b="0">
+                <a:solidFill>
+                  <a:schemeClr val="tx1"/>
+                </a:solidFill>
+                <a:latin typeface="+mn-lt"/>
+                <a:ea typeface="+mn-lt"/>
+                <a:cs typeface="+mn-lt"/>
+              </a:defRPr>
+            </a:defPPr>
+            <a:lvl1pPr marL="0" indent="0">
+              <a:lnSpc>
+                <a:spcPct val="110000"/>
+              </a:lnSpc>
+              <a:spcBef>
+                <a:spcPts val="0"/>
+              </a:spcBef>
+              <a:spcAft>
+                <a:spcPts val="0"/>
+              </a:spcAft>
+              <a:buNone/>
+            </a:lvl1pPr>
+            <a:lvl2pPr marL="0" indent="0">
+              <a:lnSpc>
+                <a:spcPct val="110000"/>
+              </a:lnSpc>
+              <a:spcBef>
+                <a:spcPts val="0"/>
+              </a:spcBef>
+              <a:spcAft>
+                <a:spcPts val="0"/>
+              </a:spcAft>
+              <a:buNone/>
+            </a:lvl2pPr>
+            <a:lvl3pPr marL="0" indent="0">
+              <a:lnSpc>
+                <a:spcPct val="110000"/>
+              </a:lnSpc>
+              <a:spcBef>
+                <a:spcPts val="0"/>
+              </a:spcBef>
+              <a:spcAft>
+                <a:spcPts val="0"/>
+              </a:spcAft>
+              <a:buNone/>
+            </a:lvl3pPr>
+            <a:lvl4pPr marL="0" indent="0">
+              <a:lnSpc>
+                <a:spcPct val="110000"/>
+              </a:lnSpc>
+              <a:spcBef>
+                <a:spcPts val="0"/>
+              </a:spcBef>
+              <a:spcAft>
+                <a:spcPts val="0"/>
+              </a:spcAft>
+              <a:buNone/>
+            </a:lvl4pPr>
+            <a:lvl5pPr marL="0" indent="0">
+              <a:lnSpc>
+                <a:spcPct val="110000"/>
+              </a:lnSpc>
+              <a:spcBef>
+                <a:spcPts val="0"/>
+              </a:spcBef>
+              <a:spcAft>
+                <a:spcPts val="0"/>
+              </a:spcAft>
+              <a:buNone/>
+            </a:lvl5pPr>
+            <a:lvl6pPr marL="0" indent="0">
+              <a:lnSpc>
+                <a:spcPct val="110000"/>
+              </a:lnSpc>
+              <a:spcBef>
+                <a:spcPts val="0"/>
+              </a:spcBef>
+              <a:spcAft>
+                <a:spcPts val="0"/>
+              </a:spcAft>
+              <a:buNone/>
+            </a:lvl6pPr>
+            <a:lvl7pPr marL="0" indent="0">
+              <a:lnSpc>
+                <a:spcPct val="110000"/>
+              </a:lnSpc>
+              <a:spcBef>
+                <a:spcPts val="0"/>
+              </a:spcBef>
+              <a:spcAft>
+                <a:spcPts val="0"/>
+              </a:spcAft>
+              <a:buNone/>
+            </a:lvl7pPr>
+            <a:lvl8pPr marL="0" indent="0">
+              <a:lnSpc>
+                <a:spcPct val="110000"/>
+              </a:lnSpc>
+              <a:spcBef>
+                <a:spcPts val="0"/>
+              </a:spcBef>
+              <a:spcAft>
+                <a:spcPts val="0"/>
+              </a:spcAft>
+              <a:buNone/>
+            </a:lvl8pPr>
+            <a:lvl9pPr marL="0" indent="0">
+              <a:lnSpc>
+                <a:spcPct val="110000"/>
+              </a:lnSpc>
+              <a:spcBef>
+                <a:spcPts val="0"/>
+              </a:spcBef>
+              <a:spcAft>
+                <a:spcPts val="0"/>
+              </a:spcAft>
+              <a:buNone/>
+            </a:lvl9pPr>
+          </a:lstStyle>
+          <a:p xmlns:a="http://schemas.openxmlformats.org/drawingml/2006/main"/>
+        </p:txBody>
+      </p:sp>
+    </p:spTree>
+  </p:cSld>
+</p:sldLayout>
+</file>
+
+<file path=ppt/slideLayouts/slideLayout2.xml><?xml version="1.0" encoding="utf-8"?>
+<p:sldLayout xmlns:p="http://schemas.openxmlformats.org/presentationml/2006/main">
+  <p:cSld name="Section Header">
+    <p:spTree>
+      <p:nvGrpSpPr>
+        <p:cNvPr id="1" name=""/>
+        <p:cNvGrpSpPr/>
+        <p:nvPr/>
+      </p:nvGrpSpPr>
+      <p:grpSpPr>
+        <a:xfrm xmlns:a="http://schemas.openxmlformats.org/drawingml/2006/main"/>
+      </p:grpSpPr>
+      <p:sp>
+        <p:nvSpPr>
+          <p:cNvPr id="2" name="Section title">
+            <a:extLst xmlns:a="http://schemas.openxmlformats.org/drawingml/2006/main">
+              <a:ext uri="{FF2B5EF4-FFF2-40B4-BE49-F238E27FC236}">
+                <a16:creationId xmlns:a16="http://schemas.microsoft.com/office/drawing/2014/main" id="{BD32B98E-74E5-4219-978E-71630D3E04EA}"/>
+              </a:ext>
+            </a:extLst>
+          </p:cNvPr>
+          <p:cNvSpPr>
+            <a:spLocks xmlns:a="http://schemas.openxmlformats.org/drawingml/2006/main" noGrp="1"/>
+          </p:cNvSpPr>
+          <p:nvPr>
+            <p:ph type="title" idx="0"/>
+          </p:nvPr>
+        </p:nvSpPr>
+        <p:spPr>
+          <a:xfrm xmlns:a="http://schemas.openxmlformats.org/drawingml/2006/main">
+            <a:off x="1219200" y="2857500"/>
+            <a:ext cx="9753600" cy="1143000"/>
+          </a:xfrm>
+          <a:prstGeom xmlns:a="http://schemas.openxmlformats.org/drawingml/2006/main" prst="rect">
+            <a:avLst/>
+          </a:prstGeom>
+          <a:noFill xmlns:a="http://schemas.openxmlformats.org/drawingml/2006/main"/>
+          <a:ln xmlns:a="http://schemas.openxmlformats.org/drawingml/2006/main">
+            <a:noFill/>
+            <a:prstDash val="solid"/>
+          </a:ln>
+        </p:spPr>
+        <p:txBody>
+          <a:bodyPr xmlns:a="http://schemas.openxmlformats.org/drawingml/2006/main" wrap="square" lIns="0" tIns="0" rIns="0" bIns="0" anchor="ctr">
+            <a:normAutofit/>
+          </a:bodyPr>
+          <a:lstStyle xmlns:a="http://schemas.openxmlformats.org/drawingml/2006/main">
+            <a:defPPr algn="ctr">
+              <a:defRPr sz="4200" b="1">
+                <a:solidFill>
+                  <a:schemeClr val="tx1"/>
+                </a:solidFill>
+                <a:latin typeface="+mj-lt"/>
+                <a:ea typeface="+mj-lt"/>
+                <a:cs typeface="+mj-lt"/>
+              </a:defRPr>
+            </a:defPPr>
+            <a:lvl1pPr marL="0" indent="0">
+              <a:lnSpc>
+                <a:spcPct val="110000"/>
+              </a:lnSpc>
+              <a:spcBef>
+                <a:spcPts val="0"/>
+              </a:spcBef>
+              <a:spcAft>
+                <a:spcPts val="0"/>
+              </a:spcAft>
+              <a:buNone/>
+            </a:lvl1pPr>
+            <a:lvl2pPr marL="0" indent="0">
+              <a:lnSpc>
+                <a:spcPct val="110000"/>
+              </a:lnSpc>
+              <a:spcBef>
+                <a:spcPts val="0"/>
+              </a:spcBef>
+              <a:spcAft>
+                <a:spcPts val="0"/>
+              </a:spcAft>
+              <a:buNone/>
+            </a:lvl2pPr>
+            <a:lvl3pPr marL="0" indent="0">
+              <a:lnSpc>
+                <a:spcPct val="110000"/>
+              </a:lnSpc>
+              <a:spcBef>
+                <a:spcPts val="0"/>
+              </a:spcBef>
+              <a:spcAft>
+                <a:spcPts val="0"/>
+              </a:spcAft>
+              <a:buNone/>
+            </a:lvl3pPr>
+            <a:lvl4pPr marL="0" indent="0">
+              <a:lnSpc>
+                <a:spcPct val="110000"/>
+              </a:lnSpc>
+              <a:spcBef>
+                <a:spcPts val="0"/>
+              </a:spcBef>
+              <a:spcAft>
+                <a:spcPts val="0"/>
+              </a:spcAft>
+              <a:buNone/>
+            </a:lvl4pPr>
+            <a:lvl5pPr marL="0" indent="0">
+              <a:lnSpc>
+                <a:spcPct val="110000"/>
+              </a:lnSpc>
+              <a:spcBef>
+                <a:spcPts val="0"/>
+              </a:spcBef>
+              <a:spcAft>
+                <a:spcPts val="0"/>
+              </a:spcAft>
+              <a:buNone/>
+            </a:lvl5pPr>
+            <a:lvl6pPr marL="0" indent="0">
+              <a:lnSpc>
+                <a:spcPct val="110000"/>
+              </a:lnSpc>
+              <a:spcBef>
+                <a:spcPts val="0"/>
+              </a:spcBef>
+              <a:spcAft>
+                <a:spcPts val="0"/>
+              </a:spcAft>
+              <a:buNone/>
+            </a:lvl6pPr>
+            <a:lvl7pPr marL="0" indent="0">
+              <a:lnSpc>
+                <a:spcPct val="110000"/>
+              </a:lnSpc>
+              <a:spcBef>
+                <a:spcPts val="0"/>
+              </a:spcBef>
+              <a:spcAft>
+                <a:spcPts val="0"/>
+              </a:spcAft>
+              <a:buNone/>
+            </a:lvl7pPr>
+            <a:lvl8pPr marL="0" indent="0">
+              <a:lnSpc>
+                <a:spcPct val="110000"/>
+              </a:lnSpc>
+              <a:spcBef>
+                <a:spcPts val="0"/>
+              </a:spcBef>
+              <a:spcAft>
+                <a:spcPts val="0"/>
+              </a:spcAft>
+              <a:buNone/>
+            </a:lvl8pPr>
+            <a:lvl9pPr marL="0" indent="0">
+              <a:lnSpc>
+                <a:spcPct val="110000"/>
+              </a:lnSpc>
+              <a:spcBef>
+                <a:spcPts val="0"/>
+              </a:spcBef>
+              <a:spcAft>
+                <a:spcPts val="0"/>
+              </a:spcAft>
+              <a:buNone/>
+            </a:lvl9pPr>
+          </a:lstStyle>
+          <a:p xmlns:a="http://schemas.openxmlformats.org/drawingml/2006/main"/>
+        </p:txBody>
+      </p:sp>
+    </p:spTree>
+  </p:cSld>
+</p:sldLayout>
+</file>
+
+<file path=ppt/slideLayouts/slideLayout3.xml><?xml version="1.0" encoding="utf-8"?>
+<p:sldLayout xmlns:p="http://schemas.openxmlformats.org/presentationml/2006/main">
+  <p:cSld name="Title and Body">
+    <p:spTree>
+      <p:nvGrpSpPr>
+        <p:cNvPr id="1" name=""/>
+        <p:cNvGrpSpPr/>
+        <p:nvPr/>
+      </p:nvGrpSpPr>
+      <p:grpSpPr>
+        <a:xfrm xmlns:a="http://schemas.openxmlformats.org/drawingml/2006/main"/>
+      </p:grpSpPr>
+      <p:sp>
+        <p:nvSpPr>
+          <p:cNvPr id="3" name="Title">
+            <a:extLst xmlns:a="http://schemas.openxmlformats.org/drawingml/2006/main">
+              <a:ext uri="{FF2B5EF4-FFF2-40B4-BE49-F238E27FC236}">
+                <a16:creationId xmlns:a16="http://schemas.microsoft.com/office/drawing/2014/main" id="{C8E1547B-AEC9-4187-9CFC-F102D33C13F1}"/>
+              </a:ext>
+            </a:extLst>
+          </p:cNvPr>
+          <p:cNvSpPr>
+            <a:spLocks xmlns:a="http://schemas.openxmlformats.org/drawingml/2006/main" noGrp="1"/>
+          </p:cNvSpPr>
+          <p:nvPr>
+            <p:ph type="title" idx="0"/>
+          </p:nvPr>
+        </p:nvSpPr>
+        <p:spPr>
+          <a:xfrm xmlns:a="http://schemas.openxmlformats.org/drawingml/2006/main">
+            <a:off x="685800" y="533400"/>
+            <a:ext cx="10820400" cy="838200"/>
+          </a:xfrm>
+          <a:prstGeom xmlns:a="http://schemas.openxmlformats.org/drawingml/2006/main" prst="rect">
+            <a:avLst/>
+          </a:prstGeom>
+          <a:noFill xmlns:a="http://schemas.openxmlformats.org/drawingml/2006/main"/>
+          <a:ln xmlns:a="http://schemas.openxmlformats.org/drawingml/2006/main">
+            <a:noFill/>
+            <a:prstDash val="solid"/>
+          </a:ln>
+        </p:spPr>
+        <p:txBody>
+          <a:bodyPr xmlns:a="http://schemas.openxmlformats.org/drawingml/2006/main" wrap="square" lIns="0" tIns="0" rIns="0" bIns="0" anchor="t">
+            <a:normAutofit/>
+          </a:bodyPr>
+          <a:lstStyle xmlns:a="http://schemas.openxmlformats.org/drawingml/2006/main">
+            <a:defPPr algn="l">
+              <a:defRPr sz="3300" b="1">
+                <a:solidFill>
+                  <a:schemeClr val="tx1"/>
+                </a:solidFill>
+                <a:latin typeface="+mj-lt"/>
+                <a:ea typeface="+mj-lt"/>
+                <a:cs typeface="+mj-lt"/>
+              </a:defRPr>
+            </a:defPPr>
+            <a:lvl1pPr marL="0" indent="0">
+              <a:lnSpc>
+                <a:spcPct val="110000"/>
+              </a:lnSpc>
+              <a:spcBef>
+                <a:spcPts val="0"/>
+              </a:spcBef>
+              <a:spcAft>
+                <a:spcPts val="0"/>
+              </a:spcAft>
+              <a:buNone/>
+            </a:lvl1pPr>
+            <a:lvl2pPr marL="0" indent="0">
+              <a:lnSpc>
+                <a:spcPct val="110000"/>
+              </a:lnSpc>
+              <a:spcBef>
+                <a:spcPts val="0"/>
+              </a:spcBef>
+              <a:spcAft>
+                <a:spcPts val="0"/>
+              </a:spcAft>
+              <a:buNone/>
+            </a:lvl2pPr>
+            <a:lvl3pPr marL="0" indent="0">
+              <a:lnSpc>
+                <a:spcPct val="110000"/>
+              </a:lnSpc>
+              <a:spcBef>
+                <a:spcPts val="0"/>
+              </a:spcBef>
+              <a:spcAft>
+                <a:spcPts val="0"/>
+              </a:spcAft>
+              <a:buNone/>
+            </a:lvl3pPr>
+            <a:lvl4pPr marL="0" indent="0">
+              <a:lnSpc>
+                <a:spcPct val="110000"/>
+              </a:lnSpc>
+              <a:spcBef>
+                <a:spcPts val="0"/>
+              </a:spcBef>
+              <a:spcAft>
+                <a:spcPts val="0"/>
+              </a:spcAft>
+              <a:buNone/>
+            </a:lvl4pPr>
+            <a:lvl5pPr marL="0" indent="0">
+              <a:lnSpc>
+                <a:spcPct val="110000"/>
+              </a:lnSpc>
+              <a:spcBef>
+                <a:spcPts val="0"/>
+              </a:spcBef>
+              <a:spcAft>
+                <a:spcPts val="0"/>
+              </a:spcAft>
+              <a:buNone/>
+            </a:lvl5pPr>
+            <a:lvl6pPr marL="0" indent="0">
+              <a:lnSpc>
+                <a:spcPct val="110000"/>
+              </a:lnSpc>
+              <a:spcBef>
+                <a:spcPts val="0"/>
+              </a:spcBef>
+              <a:spcAft>
+                <a:spcPts val="0"/>
+              </a:spcAft>
+              <a:buNone/>
+            </a:lvl6pPr>
+            <a:lvl7pPr marL="0" indent="0">
+              <a:lnSpc>
+                <a:spcPct val="110000"/>
+              </a:lnSpc>
+              <a:spcBef>
+                <a:spcPts val="0"/>
+              </a:spcBef>
+              <a:spcAft>
+                <a:spcPts val="0"/>
+              </a:spcAft>
+              <a:buNone/>
+            </a:lvl7pPr>
+            <a:lvl8pPr marL="0" indent="0">
+              <a:lnSpc>
+                <a:spcPct val="110000"/>
+              </a:lnSpc>
+              <a:spcBef>
+                <a:spcPts val="0"/>
+              </a:spcBef>
+              <a:spcAft>
+                <a:spcPts val="0"/>
+              </a:spcAft>
+              <a:buNone/>
+            </a:lvl8pPr>
+            <a:lvl9pPr marL="0" indent="0">
+              <a:lnSpc>
+                <a:spcPct val="110000"/>
+              </a:lnSpc>
+              <a:spcBef>
+                <a:spcPts val="0"/>
+              </a:spcBef>
+              <a:spcAft>
+                <a:spcPts val="0"/>
+              </a:spcAft>
+              <a:buNone/>
+            </a:lvl9pPr>
+          </a:lstStyle>
+          <a:p xmlns:a="http://schemas.openxmlformats.org/drawingml/2006/main"/>
+        </p:txBody>
+      </p:sp>
+      <p:sp>
+        <p:nvSpPr>
+          <p:cNvPr id="2" name="Body">
+            <a:extLst xmlns:a="http://schemas.openxmlformats.org/drawingml/2006/main">
+              <a:ext uri="{FF2B5EF4-FFF2-40B4-BE49-F238E27FC236}">
+                <a16:creationId xmlns:a16="http://schemas.microsoft.com/office/drawing/2014/main" id="{02C689A3-78A6-4920-B28E-B917D75B48C6}"/>
+              </a:ext>
+            </a:extLst>
+          </p:cNvPr>
+          <p:cNvSpPr>
+            <a:spLocks xmlns:a="http://schemas.openxmlformats.org/drawingml/2006/main" noGrp="1"/>
+          </p:cNvSpPr>
+          <p:nvPr>
+            <p:ph type="body" idx="1"/>
+          </p:nvPr>
+        </p:nvSpPr>
+        <p:spPr>
+          <a:xfrm xmlns:a="http://schemas.openxmlformats.org/drawingml/2006/main">
+            <a:off x="685800" y="1905000"/>
+            <a:ext cx="10820400" cy="4267200"/>
+          </a:xfrm>
+          <a:prstGeom xmlns:a="http://schemas.openxmlformats.org/drawingml/2006/main" prst="rect">
+            <a:avLst/>
+          </a:prstGeom>
+          <a:noFill xmlns:a="http://schemas.openxmlformats.org/drawingml/2006/main"/>
+          <a:ln xmlns:a="http://schemas.openxmlformats.org/drawingml/2006/main">
+            <a:noFill/>
+            <a:prstDash val="solid"/>
+          </a:ln>
+        </p:spPr>
+        <p:txBody>
+          <a:bodyPr xmlns:a="http://schemas.openxmlformats.org/drawingml/2006/main" wrap="square" lIns="0" tIns="0" rIns="0" bIns="0" anchor="t">
+            <a:normAutofit/>
+          </a:bodyPr>
+          <a:lstStyle xmlns:a="http://schemas.openxmlformats.org/drawingml/2006/main">
+            <a:defPPr algn="l">
+              <a:defRPr sz="2250" b="0">
+                <a:solidFill>
+                  <a:schemeClr val="tx1"/>
+                </a:solidFill>
+                <a:latin typeface="+mn-lt"/>
+                <a:ea typeface="+mn-lt"/>
+                <a:cs typeface="+mn-lt"/>
+              </a:defRPr>
+            </a:defPPr>
+            <a:lvl1pPr marL="228600" indent="-228600">
+              <a:lnSpc>
+                <a:spcPct val="110000"/>
+              </a:lnSpc>
+              <a:spcBef>
+                <a:spcPts val="0"/>
+              </a:spcBef>
+              <a:spcAft>
+                <a:spcPts val="1200"/>
+              </a:spcAft>
+              <a:buChar char="•"/>
+            </a:lvl1pPr>
+            <a:lvl2pPr marL="533400" indent="-228600">
+              <a:lnSpc>
+                <a:spcPct val="110000"/>
+              </a:lnSpc>
+              <a:spcBef>
+                <a:spcPts val="0"/>
+              </a:spcBef>
+              <a:spcAft>
+                <a:spcPts val="1200"/>
+              </a:spcAft>
+              <a:buChar char="•"/>
+            </a:lvl2pPr>
+            <a:lvl3pPr marL="838200" indent="-228600">
+              <a:lnSpc>
+                <a:spcPct val="110000"/>
+              </a:lnSpc>
+              <a:spcBef>
+                <a:spcPts val="0"/>
+              </a:spcBef>
+              <a:spcAft>
+                <a:spcPts val="1200"/>
+              </a:spcAft>
+              <a:buChar char="•"/>
+            </a:lvl3pPr>
+            <a:lvl4pPr marL="1143000" indent="-228600">
+              <a:lnSpc>
+                <a:spcPct val="110000"/>
+              </a:lnSpc>
+              <a:spcBef>
+                <a:spcPts val="0"/>
+              </a:spcBef>
+              <a:spcAft>
+                <a:spcPts val="1200"/>
+              </a:spcAft>
+              <a:buChar char="•"/>
+            </a:lvl4pPr>
+            <a:lvl5pPr marL="1447800" indent="-228600">
+              <a:lnSpc>
+                <a:spcPct val="110000"/>
+              </a:lnSpc>
+              <a:spcBef>
+                <a:spcPts val="0"/>
+              </a:spcBef>
+              <a:spcAft>
+                <a:spcPts val="1200"/>
+              </a:spcAft>
+              <a:buChar char="•"/>
+            </a:lvl5pPr>
+            <a:lvl6pPr marL="1752600" indent="-228600">
+              <a:lnSpc>
+                <a:spcPct val="110000"/>
+              </a:lnSpc>
+              <a:spcBef>
+                <a:spcPts val="0"/>
+              </a:spcBef>
+              <a:spcAft>
+                <a:spcPts val="1200"/>
+              </a:spcAft>
+              <a:buChar char="•"/>
+            </a:lvl6pPr>
+            <a:lvl7pPr marL="2057400" indent="-228600">
+              <a:lnSpc>
+                <a:spcPct val="110000"/>
+              </a:lnSpc>
+              <a:spcBef>
+                <a:spcPts val="0"/>
+              </a:spcBef>
+              <a:spcAft>
+                <a:spcPts val="1200"/>
+              </a:spcAft>
+              <a:buChar char="•"/>
+            </a:lvl7pPr>
+            <a:lvl8pPr marL="2362200" indent="-228600">
+              <a:lnSpc>
+                <a:spcPct val="110000"/>
+              </a:lnSpc>
+              <a:spcBef>
+                <a:spcPts val="0"/>
+              </a:spcBef>
+              <a:spcAft>
+                <a:spcPts val="1200"/>
+              </a:spcAft>
+              <a:buChar char="•"/>
+            </a:lvl8pPr>
+            <a:lvl9pPr marL="2667000" indent="-228600">
+              <a:lnSpc>
+                <a:spcPct val="110000"/>
+              </a:lnSpc>
+              <a:spcBef>
+                <a:spcPts val="0"/>
+              </a:spcBef>
+              <a:spcAft>
+                <a:spcPts val="1200"/>
+              </a:spcAft>
+              <a:buChar char="•"/>
+            </a:lvl9pPr>
+          </a:lstStyle>
+          <a:p xmlns:a="http://schemas.openxmlformats.org/drawingml/2006/main"/>
+        </p:txBody>
+      </p:sp>
+    </p:spTree>
+  </p:cSld>
+</p:sldLayout>
+</file>
+
+<file path=ppt/slideLayouts/slideLayout4.xml><?xml version="1.0" encoding="utf-8"?>
+<p:sldLayout xmlns:p="http://schemas.openxmlformats.org/presentationml/2006/main">
+  <p:cSld name="Title and Two Column">
+    <p:spTree>
+      <p:nvGrpSpPr>
+        <p:cNvPr id="1" name=""/>
+        <p:cNvGrpSpPr/>
+        <p:nvPr/>
+      </p:nvGrpSpPr>
+      <p:grpSpPr>
+        <a:xfrm xmlns:a="http://schemas.openxmlformats.org/drawingml/2006/main"/>
+      </p:grpSpPr>
+      <p:sp>
+        <p:nvSpPr>
+          <p:cNvPr id="4" name="Title">
+            <a:extLst xmlns:a="http://schemas.openxmlformats.org/drawingml/2006/main">
+              <a:ext uri="{FF2B5EF4-FFF2-40B4-BE49-F238E27FC236}">
+                <a16:creationId xmlns:a16="http://schemas.microsoft.com/office/drawing/2014/main" id="{BD812EE4-50E8-4D4B-B207-D79340D4DE96}"/>
+              </a:ext>
+            </a:extLst>
+          </p:cNvPr>
+          <p:cNvSpPr>
+            <a:spLocks xmlns:a="http://schemas.openxmlformats.org/drawingml/2006/main" noGrp="1"/>
+          </p:cNvSpPr>
+          <p:nvPr>
+            <p:ph type="title" idx="0"/>
+          </p:nvPr>
+        </p:nvSpPr>
+        <p:spPr>
+          <a:xfrm xmlns:a="http://schemas.openxmlformats.org/drawingml/2006/main">
+            <a:off x="685800" y="533400"/>
+            <a:ext cx="10820400" cy="838200"/>
+          </a:xfrm>
+          <a:prstGeom xmlns:a="http://schemas.openxmlformats.org/drawingml/2006/main" prst="rect">
+            <a:avLst/>
+          </a:prstGeom>
+          <a:noFill xmlns:a="http://schemas.openxmlformats.org/drawingml/2006/main"/>
+          <a:ln xmlns:a="http://schemas.openxmlformats.org/drawingml/2006/main">
+            <a:noFill/>
+            <a:prstDash val="solid"/>
+          </a:ln>
+        </p:spPr>
+        <p:txBody>
+          <a:bodyPr xmlns:a="http://schemas.openxmlformats.org/drawingml/2006/main" wrap="square" lIns="0" tIns="0" rIns="0" bIns="0" anchor="t">
+            <a:normAutofit/>
+          </a:bodyPr>
+          <a:lstStyle xmlns:a="http://schemas.openxmlformats.org/drawingml/2006/main">
+            <a:defPPr algn="l">
+              <a:defRPr sz="3300" b="1">
+                <a:solidFill>
+                  <a:schemeClr val="tx1"/>
+                </a:solidFill>
+                <a:latin typeface="+mj-lt"/>
+                <a:ea typeface="+mj-lt"/>
+                <a:cs typeface="+mj-lt"/>
+              </a:defRPr>
+            </a:defPPr>
+            <a:lvl1pPr marL="0" indent="0">
+              <a:lnSpc>
+                <a:spcPct val="110000"/>
+              </a:lnSpc>
+              <a:spcBef>
+                <a:spcPts val="0"/>
+              </a:spcBef>
+              <a:spcAft>
+                <a:spcPts val="0"/>
+              </a:spcAft>
+              <a:buNone/>
+            </a:lvl1pPr>
+            <a:lvl2pPr marL="0" indent="0">
+              <a:lnSpc>
+                <a:spcPct val="110000"/>
+              </a:lnSpc>
+              <a:spcBef>
+                <a:spcPts val="0"/>
+              </a:spcBef>
+              <a:spcAft>
+                <a:spcPts val="0"/>
+              </a:spcAft>
+              <a:buNone/>
+            </a:lvl2pPr>
+            <a:lvl3pPr marL="0" indent="0">
+              <a:lnSpc>
+                <a:spcPct val="110000"/>
+              </a:lnSpc>
+              <a:spcBef>
+                <a:spcPts val="0"/>
+              </a:spcBef>
+              <a:spcAft>
+                <a:spcPts val="0"/>
+              </a:spcAft>
+              <a:buNone/>
+            </a:lvl3pPr>
+            <a:lvl4pPr marL="0" indent="0">
+              <a:lnSpc>
+                <a:spcPct val="110000"/>
+              </a:lnSpc>
+              <a:spcBef>
+                <a:spcPts val="0"/>
+              </a:spcBef>
+              <a:spcAft>
+                <a:spcPts val="0"/>
+              </a:spcAft>
+              <a:buNone/>
+            </a:lvl4pPr>
+            <a:lvl5pPr marL="0" indent="0">
+              <a:lnSpc>
+                <a:spcPct val="110000"/>
+              </a:lnSpc>
+              <a:spcBef>
+                <a:spcPts val="0"/>
+              </a:spcBef>
+              <a:spcAft>
+                <a:spcPts val="0"/>
+              </a:spcAft>
+              <a:buNone/>
+            </a:lvl5pPr>
+            <a:lvl6pPr marL="0" indent="0">
+              <a:lnSpc>
+                <a:spcPct val="110000"/>
+              </a:lnSpc>
+              <a:spcBef>
+                <a:spcPts val="0"/>
+              </a:spcBef>
+              <a:spcAft>
+                <a:spcPts val="0"/>
+              </a:spcAft>
+              <a:buNone/>
+            </a:lvl6pPr>
+            <a:lvl7pPr marL="0" indent="0">
+              <a:lnSpc>
+                <a:spcPct val="110000"/>
+              </a:lnSpc>
+              <a:spcBef>
+                <a:spcPts val="0"/>
+              </a:spcBef>
+              <a:spcAft>
+                <a:spcPts val="0"/>
+              </a:spcAft>
+              <a:buNone/>
+            </a:lvl7pPr>
+            <a:lvl8pPr marL="0" indent="0">
+              <a:lnSpc>
+                <a:spcPct val="110000"/>
+              </a:lnSpc>
+              <a:spcBef>
+                <a:spcPts val="0"/>
+              </a:spcBef>
+              <a:spcAft>
+                <a:spcPts val="0"/>
+              </a:spcAft>
+              <a:buNone/>
+            </a:lvl8pPr>
+            <a:lvl9pPr marL="0" indent="0">
+              <a:lnSpc>
+                <a:spcPct val="110000"/>
+              </a:lnSpc>
+              <a:spcBef>
+                <a:spcPts val="0"/>
+              </a:spcBef>
+              <a:spcAft>
+                <a:spcPts val="0"/>
+              </a:spcAft>
+              <a:buNone/>
+            </a:lvl9pPr>
+          </a:lstStyle>
+          <a:p xmlns:a="http://schemas.openxmlformats.org/drawingml/2006/main"/>
+        </p:txBody>
+      </p:sp>
+      <p:sp>
+        <p:nvSpPr>
+          <p:cNvPr id="2" name="Left column">
+            <a:extLst xmlns:a="http://schemas.openxmlformats.org/drawingml/2006/main">
+              <a:ext uri="{FF2B5EF4-FFF2-40B4-BE49-F238E27FC236}">
+                <a16:creationId xmlns:a16="http://schemas.microsoft.com/office/drawing/2014/main" id="{CAC67AF3-6E24-4F6A-A32B-06D022BF8EC8}"/>
+              </a:ext>
+            </a:extLst>
+          </p:cNvPr>
+          <p:cNvSpPr>
+            <a:spLocks xmlns:a="http://schemas.openxmlformats.org/drawingml/2006/main" noGrp="1"/>
+          </p:cNvSpPr>
+          <p:nvPr>
+            <p:ph type="body" idx="1"/>
+          </p:nvPr>
+        </p:nvSpPr>
+        <p:spPr>
+          <a:xfrm xmlns:a="http://schemas.openxmlformats.org/drawingml/2006/main">
+            <a:off x="685800" y="1905000"/>
+            <a:ext cx="5029200" cy="4267200"/>
+          </a:xfrm>
+          <a:prstGeom xmlns:a="http://schemas.openxmlformats.org/drawingml/2006/main" prst="rect">
+            <a:avLst/>
+          </a:prstGeom>
+          <a:noFill xmlns:a="http://schemas.openxmlformats.org/drawingml/2006/main"/>
+          <a:ln xmlns:a="http://schemas.openxmlformats.org/drawingml/2006/main">
+            <a:noFill/>
+            <a:prstDash val="solid"/>
+          </a:ln>
+        </p:spPr>
+        <p:txBody>
+          <a:bodyPr xmlns:a="http://schemas.openxmlformats.org/drawingml/2006/main" wrap="square" lIns="0" tIns="0" rIns="0" bIns="0" anchor="t">
+            <a:normAutofit/>
+          </a:bodyPr>
+          <a:lstStyle xmlns:a="http://schemas.openxmlformats.org/drawingml/2006/main">
+            <a:defPPr algn="l">
+              <a:defRPr sz="2100" b="0">
+                <a:solidFill>
+                  <a:schemeClr val="tx1"/>
+                </a:solidFill>
+                <a:latin typeface="+mn-lt"/>
+                <a:ea typeface="+mn-lt"/>
+                <a:cs typeface="+mn-lt"/>
+              </a:defRPr>
+            </a:defPPr>
+            <a:lvl1pPr marL="228600" indent="-228600">
+              <a:lnSpc>
+                <a:spcPct val="110000"/>
+              </a:lnSpc>
+              <a:spcBef>
+                <a:spcPts val="0"/>
+              </a:spcBef>
+              <a:spcAft>
+                <a:spcPts val="1200"/>
+              </a:spcAft>
+              <a:buChar char="•"/>
+            </a:lvl1pPr>
+            <a:lvl2pPr marL="533400" indent="-228600">
+              <a:lnSpc>
+                <a:spcPct val="110000"/>
+              </a:lnSpc>
+              <a:spcBef>
+                <a:spcPts val="0"/>
+              </a:spcBef>
+              <a:spcAft>
+                <a:spcPts val="1200"/>
+              </a:spcAft>
+              <a:buChar char="•"/>
+            </a:lvl2pPr>
+            <a:lvl3pPr marL="838200" indent="-228600">
+              <a:lnSpc>
+                <a:spcPct val="110000"/>
+              </a:lnSpc>
+              <a:spcBef>
+                <a:spcPts val="0"/>
+              </a:spcBef>
+              <a:spcAft>
+                <a:spcPts val="1200"/>
+              </a:spcAft>
+              <a:buChar char="•"/>
+            </a:lvl3pPr>
+            <a:lvl4pPr marL="1143000" indent="-228600">
+              <a:lnSpc>
+                <a:spcPct val="110000"/>
+              </a:lnSpc>
+              <a:spcBef>
+                <a:spcPts val="0"/>
+              </a:spcBef>
+              <a:spcAft>
+                <a:spcPts val="1200"/>
+              </a:spcAft>
+              <a:buChar char="•"/>
+            </a:lvl4pPr>
+            <a:lvl5pPr marL="1447800" indent="-228600">
+              <a:lnSpc>
+                <a:spcPct val="110000"/>
+              </a:lnSpc>
+              <a:spcBef>
+                <a:spcPts val="0"/>
+              </a:spcBef>
+              <a:spcAft>
+                <a:spcPts val="1200"/>
+              </a:spcAft>
+              <a:buChar char="•"/>
+            </a:lvl5pPr>
+            <a:lvl6pPr marL="1752600" indent="-228600">
+              <a:lnSpc>
+                <a:spcPct val="110000"/>
+              </a:lnSpc>
+              <a:spcBef>
+                <a:spcPts val="0"/>
+              </a:spcBef>
+              <a:spcAft>
+                <a:spcPts val="1200"/>
+              </a:spcAft>
+              <a:buChar char="•"/>
+            </a:lvl6pPr>
+            <a:lvl7pPr marL="2057400" indent="-228600">
+              <a:lnSpc>
+                <a:spcPct val="110000"/>
+              </a:lnSpc>
+              <a:spcBef>
+                <a:spcPts val="0"/>
+              </a:spcBef>
+              <a:spcAft>
+                <a:spcPts val="1200"/>
+              </a:spcAft>
+              <a:buChar char="•"/>
+            </a:lvl7pPr>
+            <a:lvl8pPr marL="2362200" indent="-228600">
+              <a:lnSpc>
+                <a:spcPct val="110000"/>
+              </a:lnSpc>
+              <a:spcBef>
+                <a:spcPts val="0"/>
+              </a:spcBef>
+              <a:spcAft>
+                <a:spcPts val="1200"/>
+              </a:spcAft>
+              <a:buChar char="•"/>
+            </a:lvl8pPr>
+            <a:lvl9pPr marL="2667000" indent="-228600">
+              <a:lnSpc>
+                <a:spcPct val="110000"/>
+              </a:lnSpc>
+              <a:spcBef>
+                <a:spcPts val="0"/>
+              </a:spcBef>
+              <a:spcAft>
+                <a:spcPts val="1200"/>
+              </a:spcAft>
+              <a:buChar char="•"/>
+            </a:lvl9pPr>
+          </a:lstStyle>
+          <a:p xmlns:a="http://schemas.openxmlformats.org/drawingml/2006/main"/>
+        </p:txBody>
+      </p:sp>
+      <p:sp>
+        <p:nvSpPr>
+          <p:cNvPr id="3" name="Right column">
+            <a:extLst xmlns:a="http://schemas.openxmlformats.org/drawingml/2006/main">
+              <a:ext uri="{FF2B5EF4-FFF2-40B4-BE49-F238E27FC236}">
+                <a16:creationId xmlns:a16="http://schemas.microsoft.com/office/drawing/2014/main" id="{ED37362D-6735-4CE0-82C4-27FEB49DA8E0}"/>
+              </a:ext>
+            </a:extLst>
+          </p:cNvPr>
+          <p:cNvSpPr>
+            <a:spLocks xmlns:a="http://schemas.openxmlformats.org/drawingml/2006/main" noGrp="1"/>
+          </p:cNvSpPr>
+          <p:nvPr>
+            <p:ph type="body" idx="2"/>
+          </p:nvPr>
+        </p:nvSpPr>
+        <p:spPr>
+          <a:xfrm xmlns:a="http://schemas.openxmlformats.org/drawingml/2006/main">
+            <a:off x="6477000" y="1905000"/>
+            <a:ext cx="5029200" cy="4267200"/>
+          </a:xfrm>
+          <a:prstGeom xmlns:a="http://schemas.openxmlformats.org/drawingml/2006/main" prst="rect">
+            <a:avLst/>
+          </a:prstGeom>
+          <a:noFill xmlns:a="http://schemas.openxmlformats.org/drawingml/2006/main"/>
+          <a:ln xmlns:a="http://schemas.openxmlformats.org/drawingml/2006/main">
+            <a:noFill/>
+            <a:prstDash val="solid"/>
+          </a:ln>
+        </p:spPr>
+        <p:txBody>
+          <a:bodyPr xmlns:a="http://schemas.openxmlformats.org/drawingml/2006/main" wrap="square" lIns="0" tIns="0" rIns="0" bIns="0" anchor="t">
+            <a:normAutofit/>
+          </a:bodyPr>
+          <a:lstStyle xmlns:a="http://schemas.openxmlformats.org/drawingml/2006/main">
+            <a:defPPr algn="l">
+              <a:defRPr sz="2100" b="0">
+                <a:solidFill>
+                  <a:schemeClr val="tx1"/>
+                </a:solidFill>
+                <a:latin typeface="+mn-lt"/>
+                <a:ea typeface="+mn-lt"/>
+                <a:cs typeface="+mn-lt"/>
+              </a:defRPr>
+            </a:defPPr>
+            <a:lvl1pPr marL="228600" indent="-228600">
+              <a:lnSpc>
+                <a:spcPct val="110000"/>
+              </a:lnSpc>
+              <a:spcBef>
+                <a:spcPts val="0"/>
+              </a:spcBef>
+              <a:spcAft>
+                <a:spcPts val="1200"/>
+              </a:spcAft>
+              <a:buChar char="•"/>
+            </a:lvl1pPr>
+            <a:lvl2pPr marL="533400" indent="-228600">
+              <a:lnSpc>
+                <a:spcPct val="110000"/>
+              </a:lnSpc>
+              <a:spcBef>
+                <a:spcPts val="0"/>
+              </a:spcBef>
+              <a:spcAft>
+                <a:spcPts val="1200"/>
+              </a:spcAft>
+              <a:buChar char="•"/>
+            </a:lvl2pPr>
+            <a:lvl3pPr marL="838200" indent="-228600">
+              <a:lnSpc>
+                <a:spcPct val="110000"/>
+              </a:lnSpc>
+              <a:spcBef>
+                <a:spcPts val="0"/>
+              </a:spcBef>
+              <a:spcAft>
+                <a:spcPts val="1200"/>
+              </a:spcAft>
+              <a:buChar char="•"/>
+            </a:lvl3pPr>
+            <a:lvl4pPr marL="1143000" indent="-228600">
+              <a:lnSpc>
+                <a:spcPct val="110000"/>
+              </a:lnSpc>
+              <a:spcBef>
+                <a:spcPts val="0"/>
+              </a:spcBef>
+              <a:spcAft>
+                <a:spcPts val="1200"/>
+              </a:spcAft>
+              <a:buChar char="•"/>
+            </a:lvl4pPr>
+            <a:lvl5pPr marL="1447800" indent="-228600">
+              <a:lnSpc>
+                <a:spcPct val="110000"/>
+              </a:lnSpc>
+              <a:spcBef>
+                <a:spcPts val="0"/>
+              </a:spcBef>
+              <a:spcAft>
+                <a:spcPts val="1200"/>
+              </a:spcAft>
+              <a:buChar char="•"/>
+            </a:lvl5pPr>
+            <a:lvl6pPr marL="1752600" indent="-228600">
+              <a:lnSpc>
+                <a:spcPct val="110000"/>
+              </a:lnSpc>
+              <a:spcBef>
+                <a:spcPts val="0"/>
+              </a:spcBef>
+              <a:spcAft>
+                <a:spcPts val="1200"/>
+              </a:spcAft>
+              <a:buChar char="•"/>
+            </a:lvl6pPr>
+            <a:lvl7pPr marL="2057400" indent="-228600">
+              <a:lnSpc>
+                <a:spcPct val="110000"/>
+              </a:lnSpc>
+              <a:spcBef>
+                <a:spcPts val="0"/>
+              </a:spcBef>
+              <a:spcAft>
+                <a:spcPts val="1200"/>
+              </a:spcAft>
+              <a:buChar char="•"/>
+            </a:lvl7pPr>
+            <a:lvl8pPr marL="2362200" indent="-228600">
+              <a:lnSpc>
+                <a:spcPct val="110000"/>
+              </a:lnSpc>
+              <a:spcBef>
+                <a:spcPts val="0"/>
+              </a:spcBef>
+              <a:spcAft>
+                <a:spcPts val="1200"/>
+              </a:spcAft>
+              <a:buChar char="•"/>
+            </a:lvl8pPr>
+            <a:lvl9pPr marL="2667000" indent="-228600">
+              <a:lnSpc>
+                <a:spcPct val="110000"/>
+              </a:lnSpc>
+              <a:spcBef>
+                <a:spcPts val="0"/>
+              </a:spcBef>
+              <a:spcAft>
+                <a:spcPts val="1200"/>
+              </a:spcAft>
+              <a:buChar char="•"/>
+            </a:lvl9pPr>
+          </a:lstStyle>
+          <a:p xmlns:a="http://schemas.openxmlformats.org/drawingml/2006/main"/>
+        </p:txBody>
+      </p:sp>
+    </p:spTree>
+  </p:cSld>
+</p:sldLayout>
+</file>
+
+<file path=ppt/slideLayouts/slideLayout5.xml><?xml version="1.0" encoding="utf-8"?>
+<p:sldLayout xmlns:p="http://schemas.openxmlformats.org/presentationml/2006/main">
+  <p:cSld name="Title and One Column">
+    <p:spTree>
+      <p:nvGrpSpPr>
+        <p:cNvPr id="1" name=""/>
+        <p:cNvGrpSpPr/>
+        <p:nvPr/>
+      </p:nvGrpSpPr>
+      <p:grpSpPr>
+        <a:xfrm xmlns:a="http://schemas.openxmlformats.org/drawingml/2006/main"/>
+      </p:grpSpPr>
+      <p:sp>
+        <p:nvSpPr>
+          <p:cNvPr id="3" name="Title">
+            <a:extLst xmlns:a="http://schemas.openxmlformats.org/drawingml/2006/main">
+              <a:ext uri="{FF2B5EF4-FFF2-40B4-BE49-F238E27FC236}">
+                <a16:creationId xmlns:a16="http://schemas.microsoft.com/office/drawing/2014/main" id="{FE34C2F8-0A4A-4866-82B6-9F0AB449BB24}"/>
+              </a:ext>
+            </a:extLst>
+          </p:cNvPr>
+          <p:cNvSpPr>
+            <a:spLocks xmlns:a="http://schemas.openxmlformats.org/drawingml/2006/main" noGrp="1"/>
+          </p:cNvSpPr>
+          <p:nvPr>
+            <p:ph type="title" idx="0"/>
+          </p:nvPr>
+        </p:nvSpPr>
+        <p:spPr>
+          <a:xfrm xmlns:a="http://schemas.openxmlformats.org/drawingml/2006/main">
+            <a:off x="685800" y="533400"/>
+            <a:ext cx="10820400" cy="838200"/>
+          </a:xfrm>
+          <a:prstGeom xmlns:a="http://schemas.openxmlformats.org/drawingml/2006/main" prst="rect">
+            <a:avLst/>
+          </a:prstGeom>
+          <a:noFill xmlns:a="http://schemas.openxmlformats.org/drawingml/2006/main"/>
+          <a:ln xmlns:a="http://schemas.openxmlformats.org/drawingml/2006/main">
+            <a:noFill/>
+            <a:prstDash val="solid"/>
+          </a:ln>
+        </p:spPr>
+        <p:txBody>
+          <a:bodyPr xmlns:a="http://schemas.openxmlformats.org/drawingml/2006/main" wrap="square" lIns="0" tIns="0" rIns="0" bIns="0" anchor="t">
+            <a:normAutofit/>
+          </a:bodyPr>
+          <a:lstStyle xmlns:a="http://schemas.openxmlformats.org/drawingml/2006/main">
+            <a:defPPr algn="l">
+              <a:defRPr sz="3300" b="1">
+                <a:solidFill>
+                  <a:schemeClr val="tx1"/>
+                </a:solidFill>
+                <a:latin typeface="+mj-lt"/>
+                <a:ea typeface="+mj-lt"/>
+                <a:cs typeface="+mj-lt"/>
+              </a:defRPr>
+            </a:defPPr>
+            <a:lvl1pPr marL="0" indent="0">
+              <a:lnSpc>
+                <a:spcPct val="110000"/>
+              </a:lnSpc>
+              <a:spcBef>
+                <a:spcPts val="0"/>
+              </a:spcBef>
+              <a:spcAft>
+                <a:spcPts val="0"/>
+              </a:spcAft>
+              <a:buNone/>
+            </a:lvl1pPr>
+            <a:lvl2pPr marL="0" indent="0">
+              <a:lnSpc>
+                <a:spcPct val="110000"/>
+              </a:lnSpc>
+              <a:spcBef>
+                <a:spcPts val="0"/>
+              </a:spcBef>
+              <a:spcAft>
+                <a:spcPts val="0"/>
+              </a:spcAft>
+              <a:buNone/>
+            </a:lvl2pPr>
+            <a:lvl3pPr marL="0" indent="0">
+              <a:lnSpc>
+                <a:spcPct val="110000"/>
+              </a:lnSpc>
+              <a:spcBef>
+                <a:spcPts val="0"/>
+              </a:spcBef>
+              <a:spcAft>
+                <a:spcPts val="0"/>
+              </a:spcAft>
+              <a:buNone/>
+            </a:lvl3pPr>
+            <a:lvl4pPr marL="0" indent="0">
+              <a:lnSpc>
+                <a:spcPct val="110000"/>
+              </a:lnSpc>
+              <a:spcBef>
+                <a:spcPts val="0"/>
+              </a:spcBef>
+              <a:spcAft>
+                <a:spcPts val="0"/>
+              </a:spcAft>
+              <a:buNone/>
+            </a:lvl4pPr>
+            <a:lvl5pPr marL="0" indent="0">
+              <a:lnSpc>
+                <a:spcPct val="110000"/>
+              </a:lnSpc>
+              <a:spcBef>
+                <a:spcPts val="0"/>
+              </a:spcBef>
+              <a:spcAft>
+                <a:spcPts val="0"/>
+              </a:spcAft>
+              <a:buNone/>
+            </a:lvl5pPr>
+            <a:lvl6pPr marL="0" indent="0">
+              <a:lnSpc>
+                <a:spcPct val="110000"/>
+              </a:lnSpc>
+              <a:spcBef>
+                <a:spcPts val="0"/>
+              </a:spcBef>
+              <a:spcAft>
+                <a:spcPts val="0"/>
+              </a:spcAft>
+              <a:buNone/>
+            </a:lvl6pPr>
+            <a:lvl7pPr marL="0" indent="0">
+              <a:lnSpc>
+                <a:spcPct val="110000"/>
+              </a:lnSpc>
+              <a:spcBef>
+                <a:spcPts val="0"/>
+              </a:spcBef>
+              <a:spcAft>
+                <a:spcPts val="0"/>
+              </a:spcAft>
+              <a:buNone/>
+            </a:lvl7pPr>
+            <a:lvl8pPr marL="0" indent="0">
+              <a:lnSpc>
+                <a:spcPct val="110000"/>
+              </a:lnSpc>
+              <a:spcBef>
+                <a:spcPts val="0"/>
+              </a:spcBef>
+              <a:spcAft>
+                <a:spcPts val="0"/>
+              </a:spcAft>
+              <a:buNone/>
+            </a:lvl8pPr>
+            <a:lvl9pPr marL="0" indent="0">
+              <a:lnSpc>
+                <a:spcPct val="110000"/>
+              </a:lnSpc>
+              <a:spcBef>
+                <a:spcPts val="0"/>
+              </a:spcBef>
+              <a:spcAft>
+                <a:spcPts val="0"/>
+              </a:spcAft>
+              <a:buNone/>
+            </a:lvl9pPr>
+          </a:lstStyle>
+          <a:p xmlns:a="http://schemas.openxmlformats.org/drawingml/2006/main"/>
+        </p:txBody>
+      </p:sp>
+      <p:sp>
+        <p:nvSpPr>
+          <p:cNvPr id="2" name="Left column">
+            <a:extLst xmlns:a="http://schemas.openxmlformats.org/drawingml/2006/main">
+              <a:ext uri="{FF2B5EF4-FFF2-40B4-BE49-F238E27FC236}">
+                <a16:creationId xmlns:a16="http://schemas.microsoft.com/office/drawing/2014/main" id="{E61EC821-6A16-4247-AA41-0B5DB1BD36D0}"/>
+              </a:ext>
+            </a:extLst>
+          </p:cNvPr>
+          <p:cNvSpPr>
+            <a:spLocks xmlns:a="http://schemas.openxmlformats.org/drawingml/2006/main" noGrp="1"/>
+          </p:cNvSpPr>
+          <p:nvPr>
+            <p:ph type="body" idx="1"/>
+          </p:nvPr>
+        </p:nvSpPr>
+        <p:spPr>
+          <a:xfrm xmlns:a="http://schemas.openxmlformats.org/drawingml/2006/main">
+            <a:off x="685800" y="1905000"/>
+            <a:ext cx="5029200" cy="4267200"/>
+          </a:xfrm>
+          <a:prstGeom xmlns:a="http://schemas.openxmlformats.org/drawingml/2006/main" prst="rect">
+            <a:avLst/>
+          </a:prstGeom>
+          <a:noFill xmlns:a="http://schemas.openxmlformats.org/drawingml/2006/main"/>
+          <a:ln xmlns:a="http://schemas.openxmlformats.org/drawingml/2006/main">
+            <a:noFill/>
+            <a:prstDash val="solid"/>
+          </a:ln>
+        </p:spPr>
+        <p:txBody>
+          <a:bodyPr xmlns:a="http://schemas.openxmlformats.org/drawingml/2006/main" wrap="square" lIns="0" tIns="0" rIns="0" bIns="0" anchor="t">
+            <a:normAutofit/>
+          </a:bodyPr>
+          <a:lstStyle xmlns:a="http://schemas.openxmlformats.org/drawingml/2006/main">
+            <a:defPPr algn="l">
+              <a:defRPr sz="2250" b="0">
+                <a:solidFill>
+                  <a:schemeClr val="tx1"/>
+                </a:solidFill>
+                <a:latin typeface="+mn-lt"/>
+                <a:ea typeface="+mn-lt"/>
+                <a:cs typeface="+mn-lt"/>
+              </a:defRPr>
+            </a:defPPr>
+            <a:lvl1pPr marL="228600" indent="-228600">
+              <a:lnSpc>
+                <a:spcPct val="110000"/>
+              </a:lnSpc>
+              <a:spcBef>
+                <a:spcPts val="0"/>
+              </a:spcBef>
+              <a:spcAft>
+                <a:spcPts val="1200"/>
+              </a:spcAft>
+              <a:buChar char="•"/>
+            </a:lvl1pPr>
+            <a:lvl2pPr marL="533400" indent="-228600">
+              <a:lnSpc>
+                <a:spcPct val="110000"/>
+              </a:lnSpc>
+              <a:spcBef>
+                <a:spcPts val="0"/>
+              </a:spcBef>
+              <a:spcAft>
+                <a:spcPts val="1200"/>
+              </a:spcAft>
+              <a:buChar char="•"/>
+            </a:lvl2pPr>
+            <a:lvl3pPr marL="838200" indent="-228600">
+              <a:lnSpc>
+                <a:spcPct val="110000"/>
+              </a:lnSpc>
+              <a:spcBef>
+                <a:spcPts val="0"/>
+              </a:spcBef>
+              <a:spcAft>
+                <a:spcPts val="1200"/>
+              </a:spcAft>
+              <a:buChar char="•"/>
+            </a:lvl3pPr>
+            <a:lvl4pPr marL="1143000" indent="-228600">
+              <a:lnSpc>
+                <a:spcPct val="110000"/>
+              </a:lnSpc>
+              <a:spcBef>
+                <a:spcPts val="0"/>
+              </a:spcBef>
+              <a:spcAft>
+                <a:spcPts val="1200"/>
+              </a:spcAft>
+              <a:buChar char="•"/>
+            </a:lvl4pPr>
+            <a:lvl5pPr marL="1447800" indent="-228600">
+              <a:lnSpc>
+                <a:spcPct val="110000"/>
+              </a:lnSpc>
+              <a:spcBef>
+                <a:spcPts val="0"/>
+              </a:spcBef>
+              <a:spcAft>
+                <a:spcPts val="1200"/>
+              </a:spcAft>
+              <a:buChar char="•"/>
+            </a:lvl5pPr>
+            <a:lvl6pPr marL="1752600" indent="-228600">
+              <a:lnSpc>
+                <a:spcPct val="110000"/>
+              </a:lnSpc>
+              <a:spcBef>
+                <a:spcPts val="0"/>
+              </a:spcBef>
+              <a:spcAft>
+                <a:spcPts val="1200"/>
+              </a:spcAft>
+              <a:buChar char="•"/>
+            </a:lvl6pPr>
+            <a:lvl7pPr marL="2057400" indent="-228600">
+              <a:lnSpc>
+                <a:spcPct val="110000"/>
+              </a:lnSpc>
+              <a:spcBef>
+                <a:spcPts val="0"/>
+              </a:spcBef>
+              <a:spcAft>
+                <a:spcPts val="1200"/>
+              </a:spcAft>
+              <a:buChar char="•"/>
+            </a:lvl7pPr>
+            <a:lvl8pPr marL="2362200" indent="-228600">
+              <a:lnSpc>
+                <a:spcPct val="110000"/>
+              </a:lnSpc>
+              <a:spcBef>
+                <a:spcPts val="0"/>
+              </a:spcBef>
+              <a:spcAft>
+                <a:spcPts val="1200"/>
+              </a:spcAft>
+              <a:buChar char="•"/>
+            </a:lvl8pPr>
+            <a:lvl9pPr marL="2667000" indent="-228600">
+              <a:lnSpc>
+                <a:spcPct val="110000"/>
+              </a:lnSpc>
+              <a:spcBef>
+                <a:spcPts val="0"/>
+              </a:spcBef>
+              <a:spcAft>
+                <a:spcPts val="1200"/>
+              </a:spcAft>
+              <a:buChar char="•"/>
+            </a:lvl9pPr>
+          </a:lstStyle>
+          <a:p xmlns:a="http://schemas.openxmlformats.org/drawingml/2006/main"/>
+        </p:txBody>
+      </p:sp>
+    </p:spTree>
+  </p:cSld>
+</p:sldLayout>
+</file>
+
+<file path=ppt/slideLayouts/slideLayout6.xml><?xml version="1.0" encoding="utf-8"?>
+<p:sldLayout xmlns:p="http://schemas.openxmlformats.org/presentationml/2006/main" type="blank">
+  <p:cSld name="Blank">
+    <p:spTree>
+      <p:nvGrpSpPr>
+        <p:cNvPr id="1" name=""/>
+        <p:cNvGrpSpPr/>
+        <p:nvPr/>
+      </p:nvGrpSpPr>
+      <p:grpSpPr>
+        <a:xfrm xmlns:a="http://schemas.openxmlformats.org/drawingml/2006/main"/>
+      </p:grpSpPr>
     </p:spTree>
   </p:cSld>
 </p:sldLayout>
@@ -895,7 +2550,12 @@
   </p:cSld>
   <p:clrMap bg1="lt1" tx1="dk1" bg2="lt2" tx2="dk2" accent1="accent1" accent2="accent2" accent3="accent3" accent4="accent4" accent5="accent5" accent6="accent6" hlink="hlink" folHlink="folHlink"/>
   <p:sldLayoutIdLst>
-    <p:sldLayoutId xmlns:r="http://schemas.openxmlformats.org/officeDocument/2006/relationships" id="2147483649" r:id="R07ffc906abe441cf"/>
+    <p:sldLayoutId xmlns:r="http://schemas.openxmlformats.org/officeDocument/2006/relationships" id="2147483649" r:id="R326f0974aa744715"/>
+    <p:sldLayoutId xmlns:r="http://schemas.openxmlformats.org/officeDocument/2006/relationships" id="2147483650" r:id="R308b7fd6150d47db"/>
+    <p:sldLayoutId xmlns:r="http://schemas.openxmlformats.org/officeDocument/2006/relationships" id="2147483651" r:id="Rfb3572429f934c88"/>
+    <p:sldLayoutId xmlns:r="http://schemas.openxmlformats.org/officeDocument/2006/relationships" id="2147483652" r:id="R79f785abcff54339"/>
+    <p:sldLayoutId xmlns:r="http://schemas.openxmlformats.org/officeDocument/2006/relationships" id="2147483653" r:id="Rc6aa4e08ddb14af3"/>
+    <p:sldLayoutId xmlns:r="http://schemas.openxmlformats.org/officeDocument/2006/relationships" id="2147483654" r:id="R78b2832a9b484eea"/>
   </p:sldLayoutIdLst>
   <p:txStyles>
     <p:titleStyle>
@@ -1218,16 +2878,16 @@
         <a:srgbClr val="96607D"/>
       </a:folHlink>
     </a:clrScheme>
-    <a:fontScheme name="Office">
+    <a:fontScheme name="">
       <a:majorFont>
-        <a:latin typeface="Calibri Light"/>
-        <a:ea typeface="Calibri Light"/>
-        <a:cs typeface="Calibri Light"/>
+        <a:latin typeface="Aptos"/>
+        <a:ea typeface=""/>
+        <a:cs typeface=""/>
       </a:majorFont>
       <a:minorFont>
-        <a:latin typeface="Calibri"/>
-        <a:ea typeface="Calibri"/>
-        <a:cs typeface="Calibri"/>
+        <a:latin typeface="Aptos"/>
+        <a:ea typeface=""/>
+        <a:cs typeface=""/>
       </a:minorFont>
     </a:fontScheme>
     <a:fmtScheme name="ChatGPT">
@@ -1446,7 +3106,7 @@
           <p:cNvPr id="5" name="">
             <a:extLst xmlns:a="http://schemas.openxmlformats.org/drawingml/2006/main">
               <a:ext uri="{FF2B5EF4-FFF2-40B4-BE49-F238E27FC236}">
-                <a16:creationId xmlns:a16="http://schemas.microsoft.com/office/drawing/2014/main" id="{2ED0D914-8A9A-460A-B04C-0B877E9B87D4}"/>
+                <a16:creationId xmlns:a16="http://schemas.microsoft.com/office/drawing/2014/main" id="{389428B9-5607-4B03-9ED0-2BD20447ED77}"/>
               </a:ext>
             </a:extLst>
           </p:cNvPr>
@@ -1472,7 +3132,18 @@
           <a:bodyPr xmlns:a="http://schemas.openxmlformats.org/drawingml/2006/main" anchor="ctr">
             <a:noAutofit/>
           </a:bodyPr>
-          <a:lstStyle xmlns:a="http://schemas.openxmlformats.org/drawingml/2006/main"/>
+          <a:lstStyle xmlns:a="http://schemas.openxmlformats.org/drawingml/2006/main">
+            <a:defPPr algn="l">
+              <a:defRPr sz="2700" b="1">
+                <a:solidFill>
+                  <a:srgbClr val="161616"/>
+                </a:solidFill>
+                <a:latin typeface="Arial"/>
+                <a:ea typeface="Arial"/>
+                <a:cs typeface="Arial"/>
+              </a:defRPr>
+            </a:defPPr>
+          </a:lstStyle>
           <a:p xmlns:a="http://schemas.openxmlformats.org/drawingml/2006/main">
             <a:pPr algn="l">
               <a:defRPr sz="2700" b="1">
@@ -1503,7 +3174,7 @@
           <p:cNvPr id="2" name="">
             <a:extLst xmlns:a="http://schemas.openxmlformats.org/drawingml/2006/main">
               <a:ext uri="{FF2B5EF4-FFF2-40B4-BE49-F238E27FC236}">
-                <a16:creationId xmlns:a16="http://schemas.microsoft.com/office/drawing/2014/main" id="{E226F6DF-6493-480C-8EC9-B1EFF0E02B7C}"/>
+                <a16:creationId xmlns:a16="http://schemas.microsoft.com/office/drawing/2014/main" id="{92688B81-5F66-402F-91CC-8D3F889AF92D}"/>
               </a:ext>
             </a:extLst>
           </p:cNvPr>
@@ -1529,7 +3200,18 @@
           <a:bodyPr xmlns:a="http://schemas.openxmlformats.org/drawingml/2006/main">
             <a:noAutofit/>
           </a:bodyPr>
-          <a:lstStyle xmlns:a="http://schemas.openxmlformats.org/drawingml/2006/main"/>
+          <a:lstStyle xmlns:a="http://schemas.openxmlformats.org/drawingml/2006/main">
+            <a:defPPr>
+              <a:defRPr sz="3750" b="1">
+                <a:solidFill>
+                  <a:srgbClr val="161616"/>
+                </a:solidFill>
+                <a:latin typeface="Arial"/>
+                <a:ea typeface="Arial"/>
+                <a:cs typeface="Arial"/>
+              </a:defRPr>
+            </a:defPPr>
+          </a:lstStyle>
           <a:p xmlns:a="http://schemas.openxmlformats.org/drawingml/2006/main">
             <a:pPr>
               <a:defRPr sz="3750" b="1">
@@ -1550,7 +3232,7 @@
                 <a:ea typeface="Arial"/>
                 <a:cs typeface="Arial"/>
               </a:rPr>
-              <a:t>Физическая модель и развёртывание</a:t>
+              <a:t>Логическая модель и развёртывание</a:t>
             </a:r>
           </a:p>
         </p:txBody>
@@ -1560,7 +3242,7 @@
           <p:cNvPr id="3" name="">
             <a:extLst xmlns:a="http://schemas.openxmlformats.org/drawingml/2006/main">
               <a:ext uri="{FF2B5EF4-FFF2-40B4-BE49-F238E27FC236}">
-                <a16:creationId xmlns:a16="http://schemas.microsoft.com/office/drawing/2014/main" id="{4187F403-4370-473D-B3CB-8DEB229C53C7}"/>
+                <a16:creationId xmlns:a16="http://schemas.microsoft.com/office/drawing/2014/main" id="{DDEA5D8A-750F-4956-B723-3A1E49370A4C}"/>
               </a:ext>
             </a:extLst>
           </p:cNvPr>
@@ -1586,7 +3268,18 @@
           <a:bodyPr xmlns:a="http://schemas.openxmlformats.org/drawingml/2006/main">
             <a:noAutofit/>
           </a:bodyPr>
-          <a:lstStyle xmlns:a="http://schemas.openxmlformats.org/drawingml/2006/main"/>
+          <a:lstStyle xmlns:a="http://schemas.openxmlformats.org/drawingml/2006/main">
+            <a:defPPr>
+              <a:defRPr sz="2250" b="0">
+                <a:solidFill>
+                  <a:srgbClr val="161616"/>
+                </a:solidFill>
+                <a:latin typeface="Arial"/>
+                <a:ea typeface="Arial"/>
+                <a:cs typeface="Arial"/>
+              </a:defRPr>
+            </a:defPPr>
+          </a:lstStyle>
           <a:p xmlns:a="http://schemas.openxmlformats.org/drawingml/2006/main">
             <a:pPr>
               <a:defRPr sz="2250" b="0">
@@ -1607,7 +3300,7 @@
                 <a:ea typeface="Arial"/>
                 <a:cs typeface="Arial"/>
               </a:rPr>
-              <a:t>29 таблиц и 185 атрибутов детализируют логическую модель для PostgreSQL.</a:t>
+              <a:t>29 сущностей, 185 атрибутов и все связи представлены в одной логической модели.</a:t>
             </a:r>
           </a:p>
         </p:txBody>
@@ -1617,7 +3310,7 @@
           <p:cNvPr id="4" name="">
             <a:extLst xmlns:a="http://schemas.openxmlformats.org/drawingml/2006/main">
               <a:ext uri="{FF2B5EF4-FFF2-40B4-BE49-F238E27FC236}">
-                <a16:creationId xmlns:a16="http://schemas.microsoft.com/office/drawing/2014/main" id="{6817CDA1-948D-4729-AB84-E3D724530876}"/>
+                <a16:creationId xmlns:a16="http://schemas.microsoft.com/office/drawing/2014/main" id="{8BB5711E-E2F4-47BA-A126-C178E47B4617}"/>
               </a:ext>
             </a:extLst>
           </p:cNvPr>
@@ -1643,7 +3336,18 @@
           <a:bodyPr xmlns:a="http://schemas.openxmlformats.org/drawingml/2006/main">
             <a:noAutofit/>
           </a:bodyPr>
-          <a:lstStyle xmlns:a="http://schemas.openxmlformats.org/drawingml/2006/main"/>
+          <a:lstStyle xmlns:a="http://schemas.openxmlformats.org/drawingml/2006/main">
+            <a:defPPr>
+              <a:defRPr sz="1800" b="0">
+                <a:solidFill>
+                  <a:srgbClr val="161616"/>
+                </a:solidFill>
+                <a:latin typeface="Arial"/>
+                <a:ea typeface="Arial"/>
+                <a:cs typeface="Arial"/>
+              </a:defRPr>
+            </a:defPPr>
+          </a:lstStyle>
           <a:p xmlns:a="http://schemas.openxmlformats.org/drawingml/2006/main">
             <a:pPr>
               <a:defRPr sz="1800" b="0">
@@ -1695,7 +3399,7 @@
     </p:spTree>
     <p:extLst>
       <p:ext uri="{BB962C8B-B14F-4D97-AF65-F5344CB8AC3E}">
-        <p14:creationId xmlns:p14="http://schemas.microsoft.com/office/powerpoint/2010/main" val="145859455"/>
+        <p14:creationId xmlns:p14="http://schemas.microsoft.com/office/powerpoint/2010/main" val="345962709"/>
       </p:ext>
     </p:extLst>
   </p:cSld>
@@ -1726,7 +3430,7 @@
           <p:cNvPr id="3" name="">
             <a:extLst xmlns:a="http://schemas.openxmlformats.org/drawingml/2006/main">
               <a:ext uri="{FF2B5EF4-FFF2-40B4-BE49-F238E27FC236}">
-                <a16:creationId xmlns:a16="http://schemas.microsoft.com/office/drawing/2014/main" id="{070AFB7B-2D24-44EA-815E-B367A5713CF3}"/>
+                <a16:creationId xmlns:a16="http://schemas.microsoft.com/office/drawing/2014/main" id="{327801BA-AF0E-421B-B186-1B7C57080723}"/>
               </a:ext>
             </a:extLst>
           </p:cNvPr>
@@ -1752,7 +3456,18 @@
           <a:bodyPr xmlns:a="http://schemas.openxmlformats.org/drawingml/2006/main" anchor="ctr">
             <a:noAutofit/>
           </a:bodyPr>
-          <a:lstStyle xmlns:a="http://schemas.openxmlformats.org/drawingml/2006/main"/>
+          <a:lstStyle xmlns:a="http://schemas.openxmlformats.org/drawingml/2006/main">
+            <a:defPPr algn="l">
+              <a:defRPr sz="2700" b="1">
+                <a:solidFill>
+                  <a:srgbClr val="161616"/>
+                </a:solidFill>
+                <a:latin typeface="Arial"/>
+                <a:ea typeface="Arial"/>
+                <a:cs typeface="Arial"/>
+              </a:defRPr>
+            </a:defPPr>
+          </a:lstStyle>
           <a:p xmlns:a="http://schemas.openxmlformats.org/drawingml/2006/main">
             <a:pPr algn="l">
               <a:defRPr sz="2700" b="1">
@@ -1780,7 +3495,13 @@
       </p:sp>
       <p:graphicFrame>
         <p:nvGraphicFramePr>
-          <p:cNvPr id="4" name=""/>
+          <p:cNvPr id="2" name="">
+            <a:extLst xmlns:a="http://schemas.openxmlformats.org/drawingml/2006/main">
+              <a:ext uri="{FF2B5EF4-FFF2-40B4-BE49-F238E27FC236}">
+                <a16:creationId xmlns:a16="http://schemas.microsoft.com/office/drawing/2014/main" id="{B2B3BF3C-8A05-44C3-B024-7D34B963CA16}"/>
+              </a:ext>
+            </a:extLst>
+          </p:cNvPr>
           <p:cNvGraphicFramePr/>
           <p:nvPr/>
         </p:nvGraphicFramePr>
@@ -1817,6 +3538,30 @@
                     </a:p>
                   </a:txBody>
                   <a:tcPr marL="91440" marR="91440" marT="45720" marB="45720">
+                    <a:lnL w="9525">
+                      <a:solidFill>
+                        <a:srgbClr val="888888"/>
+                      </a:solidFill>
+                      <a:prstDash val="solid"/>
+                    </a:lnL>
+                    <a:lnR w="9525">
+                      <a:solidFill>
+                        <a:srgbClr val="888888"/>
+                      </a:solidFill>
+                      <a:prstDash val="solid"/>
+                    </a:lnR>
+                    <a:lnT w="9525">
+                      <a:solidFill>
+                        <a:srgbClr val="888888"/>
+                      </a:solidFill>
+                      <a:prstDash val="solid"/>
+                    </a:lnT>
+                    <a:lnB w="9525">
+                      <a:solidFill>
+                        <a:srgbClr val="888888"/>
+                      </a:solidFill>
+                      <a:prstDash val="solid"/>
+                    </a:lnB>
                     <a:solidFill>
                       <a:srgbClr val="F1F1F1"/>
                     </a:solidFill>
@@ -1841,6 +3586,24 @@
                     </a:p>
                   </a:txBody>
                   <a:tcPr marL="91440" marR="91440" marT="45720" marB="45720">
+                    <a:lnR w="9525">
+                      <a:solidFill>
+                        <a:srgbClr val="888888"/>
+                      </a:solidFill>
+                      <a:prstDash val="solid"/>
+                    </a:lnR>
+                    <a:lnT w="9525">
+                      <a:solidFill>
+                        <a:srgbClr val="888888"/>
+                      </a:solidFill>
+                      <a:prstDash val="solid"/>
+                    </a:lnT>
+                    <a:lnB w="9525">
+                      <a:solidFill>
+                        <a:srgbClr val="888888"/>
+                      </a:solidFill>
+                      <a:prstDash val="solid"/>
+                    </a:lnB>
                     <a:solidFill>
                       <a:srgbClr val="F1F1F1"/>
                     </a:solidFill>
@@ -1865,6 +3628,24 @@
                     </a:p>
                   </a:txBody>
                   <a:tcPr marL="91440" marR="91440" marT="45720" marB="45720">
+                    <a:lnR w="9525">
+                      <a:solidFill>
+                        <a:srgbClr val="888888"/>
+                      </a:solidFill>
+                      <a:prstDash val="solid"/>
+                    </a:lnR>
+                    <a:lnT w="9525">
+                      <a:solidFill>
+                        <a:srgbClr val="888888"/>
+                      </a:solidFill>
+                      <a:prstDash val="solid"/>
+                    </a:lnT>
+                    <a:lnB w="9525">
+                      <a:solidFill>
+                        <a:srgbClr val="888888"/>
+                      </a:solidFill>
+                      <a:prstDash val="solid"/>
+                    </a:lnB>
                     <a:solidFill>
                       <a:srgbClr val="F1F1F1"/>
                     </a:solidFill>
@@ -1891,6 +3672,24 @@
                     </a:p>
                   </a:txBody>
                   <a:tcPr marL="91440" marR="91440" marT="45720" marB="45720">
+                    <a:lnL w="9525">
+                      <a:solidFill>
+                        <a:srgbClr val="888888"/>
+                      </a:solidFill>
+                      <a:prstDash val="solid"/>
+                    </a:lnL>
+                    <a:lnR w="9525">
+                      <a:solidFill>
+                        <a:srgbClr val="888888"/>
+                      </a:solidFill>
+                      <a:prstDash val="solid"/>
+                    </a:lnR>
+                    <a:lnB w="9525">
+                      <a:solidFill>
+                        <a:srgbClr val="888888"/>
+                      </a:solidFill>
+                      <a:prstDash val="solid"/>
+                    </a:lnB>
                     <a:solidFill>
                       <a:srgbClr val="FFFFFF"/>
                     </a:solidFill>
@@ -1915,6 +3714,18 @@
                     </a:p>
                   </a:txBody>
                   <a:tcPr marL="91440" marR="91440" marT="45720" marB="45720">
+                    <a:lnR w="9525">
+                      <a:solidFill>
+                        <a:srgbClr val="888888"/>
+                      </a:solidFill>
+                      <a:prstDash val="solid"/>
+                    </a:lnR>
+                    <a:lnB w="9525">
+                      <a:solidFill>
+                        <a:srgbClr val="888888"/>
+                      </a:solidFill>
+                      <a:prstDash val="solid"/>
+                    </a:lnB>
                     <a:solidFill>
                       <a:srgbClr val="FFFFFF"/>
                     </a:solidFill>
@@ -1939,6 +3750,18 @@
                     </a:p>
                   </a:txBody>
                   <a:tcPr marL="91440" marR="91440" marT="45720" marB="45720">
+                    <a:lnR w="9525">
+                      <a:solidFill>
+                        <a:srgbClr val="888888"/>
+                      </a:solidFill>
+                      <a:prstDash val="solid"/>
+                    </a:lnR>
+                    <a:lnB w="9525">
+                      <a:solidFill>
+                        <a:srgbClr val="888888"/>
+                      </a:solidFill>
+                      <a:prstDash val="solid"/>
+                    </a:lnB>
                     <a:solidFill>
                       <a:srgbClr val="FFFFFF"/>
                     </a:solidFill>
@@ -1965,6 +3788,24 @@
                     </a:p>
                   </a:txBody>
                   <a:tcPr marL="91440" marR="91440" marT="45720" marB="45720">
+                    <a:lnL w="9525">
+                      <a:solidFill>
+                        <a:srgbClr val="888888"/>
+                      </a:solidFill>
+                      <a:prstDash val="solid"/>
+                    </a:lnL>
+                    <a:lnR w="9525">
+                      <a:solidFill>
+                        <a:srgbClr val="888888"/>
+                      </a:solidFill>
+                      <a:prstDash val="solid"/>
+                    </a:lnR>
+                    <a:lnB w="9525">
+                      <a:solidFill>
+                        <a:srgbClr val="888888"/>
+                      </a:solidFill>
+                      <a:prstDash val="solid"/>
+                    </a:lnB>
                     <a:solidFill>
                       <a:srgbClr val="FFFFFF"/>
                     </a:solidFill>
@@ -1989,6 +3830,18 @@
                     </a:p>
                   </a:txBody>
                   <a:tcPr marL="91440" marR="91440" marT="45720" marB="45720">
+                    <a:lnR w="9525">
+                      <a:solidFill>
+                        <a:srgbClr val="888888"/>
+                      </a:solidFill>
+                      <a:prstDash val="solid"/>
+                    </a:lnR>
+                    <a:lnB w="9525">
+                      <a:solidFill>
+                        <a:srgbClr val="888888"/>
+                      </a:solidFill>
+                      <a:prstDash val="solid"/>
+                    </a:lnB>
                     <a:solidFill>
                       <a:srgbClr val="FFFFFF"/>
                     </a:solidFill>
@@ -2013,6 +3866,18 @@
                     </a:p>
                   </a:txBody>
                   <a:tcPr marL="91440" marR="91440" marT="45720" marB="45720">
+                    <a:lnR w="9525">
+                      <a:solidFill>
+                        <a:srgbClr val="888888"/>
+                      </a:solidFill>
+                      <a:prstDash val="solid"/>
+                    </a:lnR>
+                    <a:lnB w="9525">
+                      <a:solidFill>
+                        <a:srgbClr val="888888"/>
+                      </a:solidFill>
+                      <a:prstDash val="solid"/>
+                    </a:lnB>
                     <a:solidFill>
                       <a:srgbClr val="FFFFFF"/>
                     </a:solidFill>
@@ -2039,6 +3904,24 @@
                     </a:p>
                   </a:txBody>
                   <a:tcPr marL="91440" marR="91440" marT="45720" marB="45720">
+                    <a:lnL w="9525">
+                      <a:solidFill>
+                        <a:srgbClr val="888888"/>
+                      </a:solidFill>
+                      <a:prstDash val="solid"/>
+                    </a:lnL>
+                    <a:lnR w="9525">
+                      <a:solidFill>
+                        <a:srgbClr val="888888"/>
+                      </a:solidFill>
+                      <a:prstDash val="solid"/>
+                    </a:lnR>
+                    <a:lnB w="9525">
+                      <a:solidFill>
+                        <a:srgbClr val="888888"/>
+                      </a:solidFill>
+                      <a:prstDash val="solid"/>
+                    </a:lnB>
                     <a:solidFill>
                       <a:srgbClr val="FFFFFF"/>
                     </a:solidFill>
@@ -2063,6 +3946,18 @@
                     </a:p>
                   </a:txBody>
                   <a:tcPr marL="91440" marR="91440" marT="45720" marB="45720">
+                    <a:lnR w="9525">
+                      <a:solidFill>
+                        <a:srgbClr val="888888"/>
+                      </a:solidFill>
+                      <a:prstDash val="solid"/>
+                    </a:lnR>
+                    <a:lnB w="9525">
+                      <a:solidFill>
+                        <a:srgbClr val="888888"/>
+                      </a:solidFill>
+                      <a:prstDash val="solid"/>
+                    </a:lnB>
                     <a:solidFill>
                       <a:srgbClr val="FFFFFF"/>
                     </a:solidFill>
@@ -2087,6 +3982,18 @@
                     </a:p>
                   </a:txBody>
                   <a:tcPr marL="91440" marR="91440" marT="45720" marB="45720">
+                    <a:lnR w="9525">
+                      <a:solidFill>
+                        <a:srgbClr val="888888"/>
+                      </a:solidFill>
+                      <a:prstDash val="solid"/>
+                    </a:lnR>
+                    <a:lnB w="9525">
+                      <a:solidFill>
+                        <a:srgbClr val="888888"/>
+                      </a:solidFill>
+                      <a:prstDash val="solid"/>
+                    </a:lnB>
                     <a:solidFill>
                       <a:srgbClr val="FFFFFF"/>
                     </a:solidFill>
@@ -2113,6 +4020,24 @@
                     </a:p>
                   </a:txBody>
                   <a:tcPr marL="91440" marR="91440" marT="45720" marB="45720">
+                    <a:lnL w="9525">
+                      <a:solidFill>
+                        <a:srgbClr val="888888"/>
+                      </a:solidFill>
+                      <a:prstDash val="solid"/>
+                    </a:lnL>
+                    <a:lnR w="9525">
+                      <a:solidFill>
+                        <a:srgbClr val="888888"/>
+                      </a:solidFill>
+                      <a:prstDash val="solid"/>
+                    </a:lnR>
+                    <a:lnB w="9525">
+                      <a:solidFill>
+                        <a:srgbClr val="888888"/>
+                      </a:solidFill>
+                      <a:prstDash val="solid"/>
+                    </a:lnB>
                     <a:solidFill>
                       <a:srgbClr val="FFFFFF"/>
                     </a:solidFill>
@@ -2137,6 +4062,18 @@
                     </a:p>
                   </a:txBody>
                   <a:tcPr marL="91440" marR="91440" marT="45720" marB="45720">
+                    <a:lnR w="9525">
+                      <a:solidFill>
+                        <a:srgbClr val="888888"/>
+                      </a:solidFill>
+                      <a:prstDash val="solid"/>
+                    </a:lnR>
+                    <a:lnB w="9525">
+                      <a:solidFill>
+                        <a:srgbClr val="888888"/>
+                      </a:solidFill>
+                      <a:prstDash val="solid"/>
+                    </a:lnB>
                     <a:solidFill>
                       <a:srgbClr val="FFFFFF"/>
                     </a:solidFill>
@@ -2161,6 +4098,18 @@
                     </a:p>
                   </a:txBody>
                   <a:tcPr marL="91440" marR="91440" marT="45720" marB="45720">
+                    <a:lnR w="9525">
+                      <a:solidFill>
+                        <a:srgbClr val="888888"/>
+                      </a:solidFill>
+                      <a:prstDash val="solid"/>
+                    </a:lnR>
+                    <a:lnB w="9525">
+                      <a:solidFill>
+                        <a:srgbClr val="888888"/>
+                      </a:solidFill>
+                      <a:prstDash val="solid"/>
+                    </a:lnB>
                     <a:solidFill>
                       <a:srgbClr val="FFFFFF"/>
                     </a:solidFill>
@@ -2187,6 +4136,24 @@
                     </a:p>
                   </a:txBody>
                   <a:tcPr marL="91440" marR="91440" marT="45720" marB="45720">
+                    <a:lnL w="9525">
+                      <a:solidFill>
+                        <a:srgbClr val="888888"/>
+                      </a:solidFill>
+                      <a:prstDash val="solid"/>
+                    </a:lnL>
+                    <a:lnR w="9525">
+                      <a:solidFill>
+                        <a:srgbClr val="888888"/>
+                      </a:solidFill>
+                      <a:prstDash val="solid"/>
+                    </a:lnR>
+                    <a:lnB w="9525">
+                      <a:solidFill>
+                        <a:srgbClr val="888888"/>
+                      </a:solidFill>
+                      <a:prstDash val="solid"/>
+                    </a:lnB>
                     <a:solidFill>
                       <a:srgbClr val="FFFFFF"/>
                     </a:solidFill>
@@ -2211,6 +4178,18 @@
                     </a:p>
                   </a:txBody>
                   <a:tcPr marL="91440" marR="91440" marT="45720" marB="45720">
+                    <a:lnR w="9525">
+                      <a:solidFill>
+                        <a:srgbClr val="888888"/>
+                      </a:solidFill>
+                      <a:prstDash val="solid"/>
+                    </a:lnR>
+                    <a:lnB w="9525">
+                      <a:solidFill>
+                        <a:srgbClr val="888888"/>
+                      </a:solidFill>
+                      <a:prstDash val="solid"/>
+                    </a:lnB>
                     <a:solidFill>
                       <a:srgbClr val="FFFFFF"/>
                     </a:solidFill>
@@ -2235,6 +4214,18 @@
                     </a:p>
                   </a:txBody>
                   <a:tcPr marL="91440" marR="91440" marT="45720" marB="45720">
+                    <a:lnR w="9525">
+                      <a:solidFill>
+                        <a:srgbClr val="888888"/>
+                      </a:solidFill>
+                      <a:prstDash val="solid"/>
+                    </a:lnR>
+                    <a:lnB w="9525">
+                      <a:solidFill>
+                        <a:srgbClr val="888888"/>
+                      </a:solidFill>
+                      <a:prstDash val="solid"/>
+                    </a:lnB>
                     <a:solidFill>
                       <a:srgbClr val="FFFFFF"/>
                     </a:solidFill>
@@ -2248,7 +4239,7 @@
     </p:spTree>
     <p:extLst>
       <p:ext uri="{BB962C8B-B14F-4D97-AF65-F5344CB8AC3E}">
-        <p14:creationId xmlns:p14="http://schemas.microsoft.com/office/powerpoint/2010/main" val="363863469"/>
+        <p14:creationId xmlns:p14="http://schemas.microsoft.com/office/powerpoint/2010/main" val="1752003744"/>
       </p:ext>
     </p:extLst>
   </p:cSld>
@@ -2276,10 +4267,10 @@
       </p:grpSpPr>
       <p:sp>
         <p:nvSpPr>
-          <p:cNvPr id="10" name="">
+          <p:cNvPr id="3" name="">
             <a:extLst xmlns:a="http://schemas.openxmlformats.org/drawingml/2006/main">
               <a:ext uri="{FF2B5EF4-FFF2-40B4-BE49-F238E27FC236}">
-                <a16:creationId xmlns:a16="http://schemas.microsoft.com/office/drawing/2014/main" id="{7B4824F1-1A26-4854-9D71-35E1E2CA6063}"/>
+                <a16:creationId xmlns:a16="http://schemas.microsoft.com/office/drawing/2014/main" id="{4493865C-DE69-4EAD-B5B6-BDA2205F6243}"/>
               </a:ext>
             </a:extLst>
           </p:cNvPr>
@@ -2305,7 +4296,18 @@
           <a:bodyPr xmlns:a="http://schemas.openxmlformats.org/drawingml/2006/main" anchor="ctr">
             <a:noAutofit/>
           </a:bodyPr>
-          <a:lstStyle xmlns:a="http://schemas.openxmlformats.org/drawingml/2006/main"/>
+          <a:lstStyle xmlns:a="http://schemas.openxmlformats.org/drawingml/2006/main">
+            <a:defPPr algn="l">
+              <a:defRPr sz="2700" b="1">
+                <a:solidFill>
+                  <a:srgbClr val="161616"/>
+                </a:solidFill>
+                <a:latin typeface="Arial"/>
+                <a:ea typeface="Arial"/>
+                <a:cs typeface="Arial"/>
+              </a:defRPr>
+            </a:defPPr>
+          </a:lstStyle>
           <a:p xmlns:a="http://schemas.openxmlformats.org/drawingml/2006/main">
             <a:pPr algn="l">
               <a:defRPr sz="2700" b="1">
@@ -2326,406 +4328,43 @@
                 <a:ea typeface="Arial"/>
                 <a:cs typeface="Arial"/>
               </a:rPr>
-              <a:t>Физические связи</a:t>
+              <a:t>Логическая модель данных и целостность</a:t>
             </a:r>
           </a:p>
         </p:txBody>
       </p:sp>
-      <p:sp>
-        <p:nvSpPr>
+      <p:pic>
+        <p:nvPicPr>
           <p:cNvPr id="2" name="">
             <a:extLst xmlns:a="http://schemas.openxmlformats.org/drawingml/2006/main">
               <a:ext uri="{FF2B5EF4-FFF2-40B4-BE49-F238E27FC236}">
-                <a16:creationId xmlns:a16="http://schemas.microsoft.com/office/drawing/2014/main" id="{79BB76D1-C1C7-4C9E-AE8C-D72EFBEE881E}"/>
+                <a16:creationId xmlns:a16="http://schemas.microsoft.com/office/drawing/2014/main" id="{663BB604-26FC-4C1D-AE59-9FDA91142A3D}"/>
               </a:ext>
             </a:extLst>
           </p:cNvPr>
-          <p:cNvSpPr>
-            <a:spLocks xmlns:a="http://schemas.openxmlformats.org/drawingml/2006/main" noGrp="1"/>
-          </p:cNvSpPr>
+          <p:cNvPicPr>
+            <a:picLocks xmlns:a="http://schemas.openxmlformats.org/drawingml/2006/main" noChangeAspect="1"/>
+          </p:cNvPicPr>
           <p:nvPr/>
-        </p:nvSpPr>
+        </p:nvPicPr>
+        <p:blipFill>
+          <a:blip xmlns:r="http://schemas.openxmlformats.org/officeDocument/2006/relationships" xmlns:a="http://schemas.openxmlformats.org/drawingml/2006/main" r:embed="R463d8efce1af4484"/>
+          <a:stretch xmlns:a="http://schemas.openxmlformats.org/drawingml/2006/main"/>
+        </p:blipFill>
         <p:spPr>
           <a:xfrm xmlns:a="http://schemas.openxmlformats.org/drawingml/2006/main">
-            <a:off x="714375" y="2238375"/>
-            <a:ext cx="2416969" cy="1428750"/>
-          </a:xfrm>
-          <a:prstGeom xmlns:a="http://schemas.openxmlformats.org/drawingml/2006/main" prst="roundRect">
-            <a:avLst>
-              <a:gd name="adj" fmla="val 5333"/>
-            </a:avLst>
-          </a:prstGeom>
-          <a:solidFill xmlns:a="http://schemas.openxmlformats.org/drawingml/2006/main">
-            <a:srgbClr val="FFFFFF"/>
-          </a:solidFill>
-          <a:ln xmlns:a="http://schemas.openxmlformats.org/drawingml/2006/main" w="19050">
-            <a:solidFill>
-              <a:srgbClr val="333333"/>
-            </a:solidFill>
-          </a:ln>
-        </p:spPr>
-        <p:txBody>
-          <a:bodyPr xmlns:a="http://schemas.openxmlformats.org/drawingml/2006/main" anchor="ctr"/>
-          <a:lstStyle xmlns:a="http://schemas.openxmlformats.org/drawingml/2006/main"/>
-          <a:p xmlns:a="http://schemas.openxmlformats.org/drawingml/2006/main">
-            <a:pPr algn="ctr">
-              <a:defRPr sz="1875">
-                <a:solidFill>
-                  <a:srgbClr val="111111"/>
-                </a:solidFill>
-                <a:latin typeface="Arial"/>
-                <a:ea typeface="Arial"/>
-                <a:cs typeface="Arial"/>
-              </a:defRPr>
-            </a:pPr>
-            <a:r>
-              <a:rPr sz="1875">
-                <a:solidFill>
-                  <a:srgbClr val="111111"/>
-                </a:solidFill>
-                <a:latin typeface="Arial"/>
-                <a:ea typeface="Arial"/>
-                <a:cs typeface="Arial"/>
-              </a:rPr>
-              <a:t>model_line</a:t>
-            </a:r>
-          </a:p>
-        </p:txBody>
-      </p:sp>
-      <p:sp>
-        <p:nvSpPr>
-          <p:cNvPr id="3" name="">
-            <a:extLst xmlns:a="http://schemas.openxmlformats.org/drawingml/2006/main">
-              <a:ext uri="{FF2B5EF4-FFF2-40B4-BE49-F238E27FC236}">
-                <a16:creationId xmlns:a16="http://schemas.microsoft.com/office/drawing/2014/main" id="{2F95B07F-0D38-44BD-94BC-B46A9F2374A1}"/>
-              </a:ext>
-            </a:extLst>
-          </p:cNvPr>
-          <p:cNvSpPr>
-            <a:spLocks xmlns:a="http://schemas.openxmlformats.org/drawingml/2006/main" noGrp="1"/>
-          </p:cNvSpPr>
-          <p:nvPr/>
-        </p:nvSpPr>
-        <p:spPr>
-          <a:xfrm xmlns:a="http://schemas.openxmlformats.org/drawingml/2006/main">
-            <a:off x="3188494" y="2800350"/>
-            <a:ext cx="228600" cy="266700"/>
-          </a:xfrm>
-          <a:prstGeom xmlns:a="http://schemas.openxmlformats.org/drawingml/2006/main" prst="rightArrow">
-            <a:avLst/>
-          </a:prstGeom>
-          <a:solidFill xmlns:a="http://schemas.openxmlformats.org/drawingml/2006/main">
-            <a:srgbClr val="444444"/>
-          </a:solidFill>
-          <a:ln xmlns:a="http://schemas.openxmlformats.org/drawingml/2006/main" w="0">
-            <a:noFill/>
-          </a:ln>
-        </p:spPr>
-      </p:sp>
-      <p:sp>
-        <p:nvSpPr>
-          <p:cNvPr id="4" name="">
-            <a:extLst xmlns:a="http://schemas.openxmlformats.org/drawingml/2006/main">
-              <a:ext uri="{FF2B5EF4-FFF2-40B4-BE49-F238E27FC236}">
-                <a16:creationId xmlns:a16="http://schemas.microsoft.com/office/drawing/2014/main" id="{E78460AD-BF9F-4C2D-B495-936A9ED3C13A}"/>
-              </a:ext>
-            </a:extLst>
-          </p:cNvPr>
-          <p:cNvSpPr>
-            <a:spLocks xmlns:a="http://schemas.openxmlformats.org/drawingml/2006/main" noGrp="1"/>
-          </p:cNvSpPr>
-          <p:nvPr/>
-        </p:nvSpPr>
-        <p:spPr>
-          <a:xfrm xmlns:a="http://schemas.openxmlformats.org/drawingml/2006/main">
-            <a:off x="3464719" y="2238375"/>
-            <a:ext cx="2416969" cy="1428750"/>
-          </a:xfrm>
-          <a:prstGeom xmlns:a="http://schemas.openxmlformats.org/drawingml/2006/main" prst="roundRect">
-            <a:avLst>
-              <a:gd name="adj" fmla="val 5333"/>
-            </a:avLst>
-          </a:prstGeom>
-          <a:solidFill xmlns:a="http://schemas.openxmlformats.org/drawingml/2006/main">
-            <a:srgbClr val="FFFFFF"/>
-          </a:solidFill>
-          <a:ln xmlns:a="http://schemas.openxmlformats.org/drawingml/2006/main" w="19050">
-            <a:solidFill>
-              <a:srgbClr val="333333"/>
-            </a:solidFill>
-          </a:ln>
-        </p:spPr>
-        <p:txBody>
-          <a:bodyPr xmlns:a="http://schemas.openxmlformats.org/drawingml/2006/main" anchor="ctr"/>
-          <a:lstStyle xmlns:a="http://schemas.openxmlformats.org/drawingml/2006/main"/>
-          <a:p xmlns:a="http://schemas.openxmlformats.org/drawingml/2006/main">
-            <a:pPr algn="ctr">
-              <a:defRPr sz="1875">
-                <a:solidFill>
-                  <a:srgbClr val="111111"/>
-                </a:solidFill>
-                <a:latin typeface="Arial"/>
-                <a:ea typeface="Arial"/>
-                <a:cs typeface="Arial"/>
-              </a:defRPr>
-            </a:pPr>
-            <a:r>
-              <a:rPr sz="1875">
-                <a:solidFill>
-                  <a:srgbClr val="111111"/>
-                </a:solidFill>
-                <a:latin typeface="Arial"/>
-                <a:ea typeface="Arial"/>
-                <a:cs typeface="Arial"/>
-              </a:rPr>
-              <a:t>model_line_version</a:t>
-            </a:r>
-          </a:p>
-        </p:txBody>
-      </p:sp>
-      <p:sp>
-        <p:nvSpPr>
-          <p:cNvPr id="5" name="">
-            <a:extLst xmlns:a="http://schemas.openxmlformats.org/drawingml/2006/main">
-              <a:ext uri="{FF2B5EF4-FFF2-40B4-BE49-F238E27FC236}">
-                <a16:creationId xmlns:a16="http://schemas.microsoft.com/office/drawing/2014/main" id="{62C58C7C-A3F4-45A1-95C9-5F03B64533B4}"/>
-              </a:ext>
-            </a:extLst>
-          </p:cNvPr>
-          <p:cNvSpPr>
-            <a:spLocks xmlns:a="http://schemas.openxmlformats.org/drawingml/2006/main" noGrp="1"/>
-          </p:cNvSpPr>
-          <p:nvPr/>
-        </p:nvSpPr>
-        <p:spPr>
-          <a:xfrm xmlns:a="http://schemas.openxmlformats.org/drawingml/2006/main">
-            <a:off x="5938838" y="2800350"/>
-            <a:ext cx="228600" cy="266700"/>
-          </a:xfrm>
-          <a:prstGeom xmlns:a="http://schemas.openxmlformats.org/drawingml/2006/main" prst="rightArrow">
-            <a:avLst/>
-          </a:prstGeom>
-          <a:solidFill xmlns:a="http://schemas.openxmlformats.org/drawingml/2006/main">
-            <a:srgbClr val="444444"/>
-          </a:solidFill>
-          <a:ln xmlns:a="http://schemas.openxmlformats.org/drawingml/2006/main" w="0">
-            <a:noFill/>
-          </a:ln>
-        </p:spPr>
-      </p:sp>
-      <p:sp>
-        <p:nvSpPr>
-          <p:cNvPr id="6" name="">
-            <a:extLst xmlns:a="http://schemas.openxmlformats.org/drawingml/2006/main">
-              <a:ext uri="{FF2B5EF4-FFF2-40B4-BE49-F238E27FC236}">
-                <a16:creationId xmlns:a16="http://schemas.microsoft.com/office/drawing/2014/main" id="{C6B74413-1D95-4157-A75B-9ABC7303D4A8}"/>
-              </a:ext>
-            </a:extLst>
-          </p:cNvPr>
-          <p:cNvSpPr>
-            <a:spLocks xmlns:a="http://schemas.openxmlformats.org/drawingml/2006/main" noGrp="1"/>
-          </p:cNvSpPr>
-          <p:nvPr/>
-        </p:nvSpPr>
-        <p:spPr>
-          <a:xfrm xmlns:a="http://schemas.openxmlformats.org/drawingml/2006/main">
-            <a:off x="6215063" y="2238375"/>
-            <a:ext cx="2416969" cy="1428750"/>
-          </a:xfrm>
-          <a:prstGeom xmlns:a="http://schemas.openxmlformats.org/drawingml/2006/main" prst="roundRect">
-            <a:avLst>
-              <a:gd name="adj" fmla="val 5333"/>
-            </a:avLst>
-          </a:prstGeom>
-          <a:solidFill xmlns:a="http://schemas.openxmlformats.org/drawingml/2006/main">
-            <a:srgbClr val="FFFFFF"/>
-          </a:solidFill>
-          <a:ln xmlns:a="http://schemas.openxmlformats.org/drawingml/2006/main" w="19050">
-            <a:solidFill>
-              <a:srgbClr val="333333"/>
-            </a:solidFill>
-          </a:ln>
-        </p:spPr>
-        <p:txBody>
-          <a:bodyPr xmlns:a="http://schemas.openxmlformats.org/drawingml/2006/main" anchor="ctr"/>
-          <a:lstStyle xmlns:a="http://schemas.openxmlformats.org/drawingml/2006/main"/>
-          <a:p xmlns:a="http://schemas.openxmlformats.org/drawingml/2006/main">
-            <a:pPr algn="ctr">
-              <a:defRPr sz="1875">
-                <a:solidFill>
-                  <a:srgbClr val="111111"/>
-                </a:solidFill>
-                <a:latin typeface="Arial"/>
-                <a:ea typeface="Arial"/>
-                <a:cs typeface="Arial"/>
-              </a:defRPr>
-            </a:pPr>
-            <a:r>
-              <a:rPr sz="1875">
-                <a:solidFill>
-                  <a:srgbClr val="111111"/>
-                </a:solidFill>
-                <a:latin typeface="Arial"/>
-                <a:ea typeface="Arial"/>
-                <a:cs typeface="Arial"/>
-              </a:rPr>
-              <a:t>model_line_slot</a:t>
-            </a:r>
-          </a:p>
-        </p:txBody>
-      </p:sp>
-      <p:sp>
-        <p:nvSpPr>
-          <p:cNvPr id="7" name="">
-            <a:extLst xmlns:a="http://schemas.openxmlformats.org/drawingml/2006/main">
-              <a:ext uri="{FF2B5EF4-FFF2-40B4-BE49-F238E27FC236}">
-                <a16:creationId xmlns:a16="http://schemas.microsoft.com/office/drawing/2014/main" id="{51EF3EB4-1FCC-4120-9AAE-55DE9B5DDE7B}"/>
-              </a:ext>
-            </a:extLst>
-          </p:cNvPr>
-          <p:cNvSpPr>
-            <a:spLocks xmlns:a="http://schemas.openxmlformats.org/drawingml/2006/main" noGrp="1"/>
-          </p:cNvSpPr>
-          <p:nvPr/>
-        </p:nvSpPr>
-        <p:spPr>
-          <a:xfrm xmlns:a="http://schemas.openxmlformats.org/drawingml/2006/main">
-            <a:off x="8689181" y="2800350"/>
-            <a:ext cx="228600" cy="266700"/>
-          </a:xfrm>
-          <a:prstGeom xmlns:a="http://schemas.openxmlformats.org/drawingml/2006/main" prst="rightArrow">
-            <a:avLst/>
-          </a:prstGeom>
-          <a:solidFill xmlns:a="http://schemas.openxmlformats.org/drawingml/2006/main">
-            <a:srgbClr val="444444"/>
-          </a:solidFill>
-          <a:ln xmlns:a="http://schemas.openxmlformats.org/drawingml/2006/main" w="0">
-            <a:noFill/>
-          </a:ln>
-        </p:spPr>
-      </p:sp>
-      <p:sp>
-        <p:nvSpPr>
-          <p:cNvPr id="8" name="">
-            <a:extLst xmlns:a="http://schemas.openxmlformats.org/drawingml/2006/main">
-              <a:ext uri="{FF2B5EF4-FFF2-40B4-BE49-F238E27FC236}">
-                <a16:creationId xmlns:a16="http://schemas.microsoft.com/office/drawing/2014/main" id="{0D9B6F15-F9B2-413B-9821-490ABC023A23}"/>
-              </a:ext>
-            </a:extLst>
-          </p:cNvPr>
-          <p:cNvSpPr>
-            <a:spLocks xmlns:a="http://schemas.openxmlformats.org/drawingml/2006/main" noGrp="1"/>
-          </p:cNvSpPr>
-          <p:nvPr/>
-        </p:nvSpPr>
-        <p:spPr>
-          <a:xfrm xmlns:a="http://schemas.openxmlformats.org/drawingml/2006/main">
-            <a:off x="8965406" y="2238375"/>
-            <a:ext cx="2416969" cy="1428750"/>
-          </a:xfrm>
-          <a:prstGeom xmlns:a="http://schemas.openxmlformats.org/drawingml/2006/main" prst="roundRect">
-            <a:avLst>
-              <a:gd name="adj" fmla="val 5333"/>
-            </a:avLst>
-          </a:prstGeom>
-          <a:solidFill xmlns:a="http://schemas.openxmlformats.org/drawingml/2006/main">
-            <a:srgbClr val="FFFFFF"/>
-          </a:solidFill>
-          <a:ln xmlns:a="http://schemas.openxmlformats.org/drawingml/2006/main" w="19050">
-            <a:solidFill>
-              <a:srgbClr val="333333"/>
-            </a:solidFill>
-          </a:ln>
-        </p:spPr>
-        <p:txBody>
-          <a:bodyPr xmlns:a="http://schemas.openxmlformats.org/drawingml/2006/main" anchor="ctr"/>
-          <a:lstStyle xmlns:a="http://schemas.openxmlformats.org/drawingml/2006/main"/>
-          <a:p xmlns:a="http://schemas.openxmlformats.org/drawingml/2006/main">
-            <a:pPr algn="ctr">
-              <a:defRPr sz="1875">
-                <a:solidFill>
-                  <a:srgbClr val="111111"/>
-                </a:solidFill>
-                <a:latin typeface="Arial"/>
-                <a:ea typeface="Arial"/>
-                <a:cs typeface="Arial"/>
-              </a:defRPr>
-            </a:pPr>
-            <a:r>
-              <a:rPr sz="1875">
-                <a:solidFill>
-                  <a:srgbClr val="111111"/>
-                </a:solidFill>
-                <a:latin typeface="Arial"/>
-                <a:ea typeface="Arial"/>
-                <a:cs typeface="Arial"/>
-              </a:rPr>
-              <a:t>slot_selection</a:t>
-            </a:r>
-          </a:p>
-        </p:txBody>
-      </p:sp>
-      <p:sp>
-        <p:nvSpPr>
-          <p:cNvPr id="9" name="">
-            <a:extLst xmlns:a="http://schemas.openxmlformats.org/drawingml/2006/main">
-              <a:ext uri="{FF2B5EF4-FFF2-40B4-BE49-F238E27FC236}">
-                <a16:creationId xmlns:a16="http://schemas.microsoft.com/office/drawing/2014/main" id="{FF0F589F-24EA-4D2A-9EEA-AC81D523223E}"/>
-              </a:ext>
-            </a:extLst>
-          </p:cNvPr>
-          <p:cNvSpPr>
-            <a:spLocks xmlns:a="http://schemas.openxmlformats.org/drawingml/2006/main" noGrp="1"/>
-          </p:cNvSpPr>
-          <p:nvPr/>
-        </p:nvSpPr>
-        <p:spPr>
-          <a:xfrm xmlns:a="http://schemas.openxmlformats.org/drawingml/2006/main">
-            <a:off x="714375" y="4429125"/>
-            <a:ext cx="10572750" cy="1285875"/>
+            <a:off x="2552330" y="1285875"/>
+            <a:ext cx="7087341" cy="5000625"/>
           </a:xfrm>
           <a:prstGeom xmlns:a="http://schemas.openxmlformats.org/drawingml/2006/main" prst="rect">
             <a:avLst/>
           </a:prstGeom>
-          <a:noFill xmlns:a="http://schemas.openxmlformats.org/drawingml/2006/main"/>
-          <a:ln xmlns:a="http://schemas.openxmlformats.org/drawingml/2006/main" w="0">
-            <a:noFill/>
-          </a:ln>
         </p:spPr>
-        <p:txBody>
-          <a:bodyPr xmlns:a="http://schemas.openxmlformats.org/drawingml/2006/main">
-            <a:noAutofit/>
-          </a:bodyPr>
-          <a:lstStyle xmlns:a="http://schemas.openxmlformats.org/drawingml/2006/main"/>
-          <a:p xmlns:a="http://schemas.openxmlformats.org/drawingml/2006/main">
-            <a:pPr>
-              <a:defRPr sz="2175" b="0">
-                <a:solidFill>
-                  <a:srgbClr val="161616"/>
-                </a:solidFill>
-                <a:latin typeface="Arial"/>
-                <a:ea typeface="Arial"/>
-                <a:cs typeface="Arial"/>
-              </a:defRPr>
-            </a:pPr>
-            <a:r>
-              <a:rPr sz="2175" b="0">
-                <a:solidFill>
-                  <a:srgbClr val="161616"/>
-                </a:solidFill>
-                <a:latin typeface="Arial"/>
-                <a:ea typeface="Arial"/>
-                <a:cs typeface="Arial"/>
-              </a:rPr>
-              <a:t>FOREIGN KEY сохраняют структуру. Принадлежность выбранного компонента и версии проверяется в транзакции.</a:t>
-            </a:r>
-          </a:p>
-        </p:txBody>
-      </p:sp>
+      </p:pic>
     </p:spTree>
     <p:extLst>
       <p:ext uri="{BB962C8B-B14F-4D97-AF65-F5344CB8AC3E}">
-        <p14:creationId xmlns:p14="http://schemas.microsoft.com/office/powerpoint/2010/main" val="1155258547"/>
+        <p14:creationId xmlns:p14="http://schemas.microsoft.com/office/powerpoint/2010/main" val="1442867029"/>
       </p:ext>
     </p:extLst>
   </p:cSld>
@@ -2756,7 +4395,7 @@
           <p:cNvPr id="3" name="">
             <a:extLst xmlns:a="http://schemas.openxmlformats.org/drawingml/2006/main">
               <a:ext uri="{FF2B5EF4-FFF2-40B4-BE49-F238E27FC236}">
-                <a16:creationId xmlns:a16="http://schemas.microsoft.com/office/drawing/2014/main" id="{26C5F3A1-15CE-45C6-A007-52668167FD96}"/>
+                <a16:creationId xmlns:a16="http://schemas.microsoft.com/office/drawing/2014/main" id="{E0840CAC-0D10-4F53-AD1E-C96F0BFF7293}"/>
               </a:ext>
             </a:extLst>
           </p:cNvPr>
@@ -2782,7 +4421,18 @@
           <a:bodyPr xmlns:a="http://schemas.openxmlformats.org/drawingml/2006/main" anchor="ctr">
             <a:noAutofit/>
           </a:bodyPr>
-          <a:lstStyle xmlns:a="http://schemas.openxmlformats.org/drawingml/2006/main"/>
+          <a:lstStyle xmlns:a="http://schemas.openxmlformats.org/drawingml/2006/main">
+            <a:defPPr algn="l">
+              <a:defRPr sz="2700" b="1">
+                <a:solidFill>
+                  <a:srgbClr val="161616"/>
+                </a:solidFill>
+                <a:latin typeface="Arial"/>
+                <a:ea typeface="Arial"/>
+                <a:cs typeface="Arial"/>
+              </a:defRPr>
+            </a:defPPr>
+          </a:lstStyle>
           <a:p xmlns:a="http://schemas.openxmlformats.org/drawingml/2006/main">
             <a:pPr algn="l">
               <a:defRPr sz="2700" b="1">
@@ -2810,7 +4460,13 @@
       </p:sp>
       <p:graphicFrame>
         <p:nvGraphicFramePr>
-          <p:cNvPr id="4" name=""/>
+          <p:cNvPr id="2" name="">
+            <a:extLst xmlns:a="http://schemas.openxmlformats.org/drawingml/2006/main">
+              <a:ext uri="{FF2B5EF4-FFF2-40B4-BE49-F238E27FC236}">
+                <a16:creationId xmlns:a16="http://schemas.microsoft.com/office/drawing/2014/main" id="{7B99AE3B-DFC9-4B28-B1D2-C69E58B45205}"/>
+              </a:ext>
+            </a:extLst>
+          </p:cNvPr>
           <p:cNvGraphicFramePr/>
           <p:nvPr/>
         </p:nvGraphicFramePr>
@@ -2846,6 +4502,30 @@
                     </a:p>
                   </a:txBody>
                   <a:tcPr marL="91440" marR="91440" marT="45720" marB="45720">
+                    <a:lnL w="9525">
+                      <a:solidFill>
+                        <a:srgbClr val="888888"/>
+                      </a:solidFill>
+                      <a:prstDash val="solid"/>
+                    </a:lnL>
+                    <a:lnR w="9525">
+                      <a:solidFill>
+                        <a:srgbClr val="888888"/>
+                      </a:solidFill>
+                      <a:prstDash val="solid"/>
+                    </a:lnR>
+                    <a:lnT w="9525">
+                      <a:solidFill>
+                        <a:srgbClr val="888888"/>
+                      </a:solidFill>
+                      <a:prstDash val="solid"/>
+                    </a:lnT>
+                    <a:lnB w="9525">
+                      <a:solidFill>
+                        <a:srgbClr val="888888"/>
+                      </a:solidFill>
+                      <a:prstDash val="solid"/>
+                    </a:lnB>
                     <a:solidFill>
                       <a:srgbClr val="F1F1F1"/>
                     </a:solidFill>
@@ -2870,6 +4550,24 @@
                     </a:p>
                   </a:txBody>
                   <a:tcPr marL="91440" marR="91440" marT="45720" marB="45720">
+                    <a:lnR w="9525">
+                      <a:solidFill>
+                        <a:srgbClr val="888888"/>
+                      </a:solidFill>
+                      <a:prstDash val="solid"/>
+                    </a:lnR>
+                    <a:lnT w="9525">
+                      <a:solidFill>
+                        <a:srgbClr val="888888"/>
+                      </a:solidFill>
+                      <a:prstDash val="solid"/>
+                    </a:lnT>
+                    <a:lnB w="9525">
+                      <a:solidFill>
+                        <a:srgbClr val="888888"/>
+                      </a:solidFill>
+                      <a:prstDash val="solid"/>
+                    </a:lnB>
                     <a:solidFill>
                       <a:srgbClr val="F1F1F1"/>
                     </a:solidFill>
@@ -2896,6 +4594,24 @@
                     </a:p>
                   </a:txBody>
                   <a:tcPr marL="91440" marR="91440" marT="45720" marB="45720">
+                    <a:lnL w="9525">
+                      <a:solidFill>
+                        <a:srgbClr val="888888"/>
+                      </a:solidFill>
+                      <a:prstDash val="solid"/>
+                    </a:lnL>
+                    <a:lnR w="9525">
+                      <a:solidFill>
+                        <a:srgbClr val="888888"/>
+                      </a:solidFill>
+                      <a:prstDash val="solid"/>
+                    </a:lnR>
+                    <a:lnB w="9525">
+                      <a:solidFill>
+                        <a:srgbClr val="888888"/>
+                      </a:solidFill>
+                      <a:prstDash val="solid"/>
+                    </a:lnB>
                     <a:solidFill>
                       <a:srgbClr val="FFFFFF"/>
                     </a:solidFill>
@@ -2920,6 +4636,18 @@
                     </a:p>
                   </a:txBody>
                   <a:tcPr marL="91440" marR="91440" marT="45720" marB="45720">
+                    <a:lnR w="9525">
+                      <a:solidFill>
+                        <a:srgbClr val="888888"/>
+                      </a:solidFill>
+                      <a:prstDash val="solid"/>
+                    </a:lnR>
+                    <a:lnB w="9525">
+                      <a:solidFill>
+                        <a:srgbClr val="888888"/>
+                      </a:solidFill>
+                      <a:prstDash val="solid"/>
+                    </a:lnB>
                     <a:solidFill>
                       <a:srgbClr val="FFFFFF"/>
                     </a:solidFill>
@@ -2946,6 +4674,24 @@
                     </a:p>
                   </a:txBody>
                   <a:tcPr marL="91440" marR="91440" marT="45720" marB="45720">
+                    <a:lnL w="9525">
+                      <a:solidFill>
+                        <a:srgbClr val="888888"/>
+                      </a:solidFill>
+                      <a:prstDash val="solid"/>
+                    </a:lnL>
+                    <a:lnR w="9525">
+                      <a:solidFill>
+                        <a:srgbClr val="888888"/>
+                      </a:solidFill>
+                      <a:prstDash val="solid"/>
+                    </a:lnR>
+                    <a:lnB w="9525">
+                      <a:solidFill>
+                        <a:srgbClr val="888888"/>
+                      </a:solidFill>
+                      <a:prstDash val="solid"/>
+                    </a:lnB>
                     <a:solidFill>
                       <a:srgbClr val="FFFFFF"/>
                     </a:solidFill>
@@ -2970,6 +4716,18 @@
                     </a:p>
                   </a:txBody>
                   <a:tcPr marL="91440" marR="91440" marT="45720" marB="45720">
+                    <a:lnR w="9525">
+                      <a:solidFill>
+                        <a:srgbClr val="888888"/>
+                      </a:solidFill>
+                      <a:prstDash val="solid"/>
+                    </a:lnR>
+                    <a:lnB w="9525">
+                      <a:solidFill>
+                        <a:srgbClr val="888888"/>
+                      </a:solidFill>
+                      <a:prstDash val="solid"/>
+                    </a:lnB>
                     <a:solidFill>
                       <a:srgbClr val="FFFFFF"/>
                     </a:solidFill>
@@ -2996,6 +4754,24 @@
                     </a:p>
                   </a:txBody>
                   <a:tcPr marL="91440" marR="91440" marT="45720" marB="45720">
+                    <a:lnL w="9525">
+                      <a:solidFill>
+                        <a:srgbClr val="888888"/>
+                      </a:solidFill>
+                      <a:prstDash val="solid"/>
+                    </a:lnL>
+                    <a:lnR w="9525">
+                      <a:solidFill>
+                        <a:srgbClr val="888888"/>
+                      </a:solidFill>
+                      <a:prstDash val="solid"/>
+                    </a:lnR>
+                    <a:lnB w="9525">
+                      <a:solidFill>
+                        <a:srgbClr val="888888"/>
+                      </a:solidFill>
+                      <a:prstDash val="solid"/>
+                    </a:lnB>
                     <a:solidFill>
                       <a:srgbClr val="FFFFFF"/>
                     </a:solidFill>
@@ -3020,6 +4796,18 @@
                     </a:p>
                   </a:txBody>
                   <a:tcPr marL="91440" marR="91440" marT="45720" marB="45720">
+                    <a:lnR w="9525">
+                      <a:solidFill>
+                        <a:srgbClr val="888888"/>
+                      </a:solidFill>
+                      <a:prstDash val="solid"/>
+                    </a:lnR>
+                    <a:lnB w="9525">
+                      <a:solidFill>
+                        <a:srgbClr val="888888"/>
+                      </a:solidFill>
+                      <a:prstDash val="solid"/>
+                    </a:lnB>
                     <a:solidFill>
                       <a:srgbClr val="FFFFFF"/>
                     </a:solidFill>
@@ -3046,6 +4834,24 @@
                     </a:p>
                   </a:txBody>
                   <a:tcPr marL="91440" marR="91440" marT="45720" marB="45720">
+                    <a:lnL w="9525">
+                      <a:solidFill>
+                        <a:srgbClr val="888888"/>
+                      </a:solidFill>
+                      <a:prstDash val="solid"/>
+                    </a:lnL>
+                    <a:lnR w="9525">
+                      <a:solidFill>
+                        <a:srgbClr val="888888"/>
+                      </a:solidFill>
+                      <a:prstDash val="solid"/>
+                    </a:lnR>
+                    <a:lnB w="9525">
+                      <a:solidFill>
+                        <a:srgbClr val="888888"/>
+                      </a:solidFill>
+                      <a:prstDash val="solid"/>
+                    </a:lnB>
                     <a:solidFill>
                       <a:srgbClr val="FFFFFF"/>
                     </a:solidFill>
@@ -3070,6 +4876,18 @@
                     </a:p>
                   </a:txBody>
                   <a:tcPr marL="91440" marR="91440" marT="45720" marB="45720">
+                    <a:lnR w="9525">
+                      <a:solidFill>
+                        <a:srgbClr val="888888"/>
+                      </a:solidFill>
+                      <a:prstDash val="solid"/>
+                    </a:lnR>
+                    <a:lnB w="9525">
+                      <a:solidFill>
+                        <a:srgbClr val="888888"/>
+                      </a:solidFill>
+                      <a:prstDash val="solid"/>
+                    </a:lnB>
                     <a:solidFill>
                       <a:srgbClr val="FFFFFF"/>
                     </a:solidFill>
@@ -3096,6 +4914,24 @@
                     </a:p>
                   </a:txBody>
                   <a:tcPr marL="91440" marR="91440" marT="45720" marB="45720">
+                    <a:lnL w="9525">
+                      <a:solidFill>
+                        <a:srgbClr val="888888"/>
+                      </a:solidFill>
+                      <a:prstDash val="solid"/>
+                    </a:lnL>
+                    <a:lnR w="9525">
+                      <a:solidFill>
+                        <a:srgbClr val="888888"/>
+                      </a:solidFill>
+                      <a:prstDash val="solid"/>
+                    </a:lnR>
+                    <a:lnB w="9525">
+                      <a:solidFill>
+                        <a:srgbClr val="888888"/>
+                      </a:solidFill>
+                      <a:prstDash val="solid"/>
+                    </a:lnB>
                     <a:solidFill>
                       <a:srgbClr val="FFFFFF"/>
                     </a:solidFill>
@@ -3120,6 +4956,18 @@
                     </a:p>
                   </a:txBody>
                   <a:tcPr marL="91440" marR="91440" marT="45720" marB="45720">
+                    <a:lnR w="9525">
+                      <a:solidFill>
+                        <a:srgbClr val="888888"/>
+                      </a:solidFill>
+                      <a:prstDash val="solid"/>
+                    </a:lnR>
+                    <a:lnB w="9525">
+                      <a:solidFill>
+                        <a:srgbClr val="888888"/>
+                      </a:solidFill>
+                      <a:prstDash val="solid"/>
+                    </a:lnB>
                     <a:solidFill>
                       <a:srgbClr val="FFFFFF"/>
                     </a:solidFill>
@@ -3133,7 +4981,7 @@
     </p:spTree>
     <p:extLst>
       <p:ext uri="{BB962C8B-B14F-4D97-AF65-F5344CB8AC3E}">
-        <p14:creationId xmlns:p14="http://schemas.microsoft.com/office/powerpoint/2010/main" val="1606599708"/>
+        <p14:creationId xmlns:p14="http://schemas.microsoft.com/office/powerpoint/2010/main" val="2035032717"/>
       </p:ext>
     </p:extLst>
   </p:cSld>
@@ -3164,7 +5012,7 @@
           <p:cNvPr id="3" name="">
             <a:extLst xmlns:a="http://schemas.openxmlformats.org/drawingml/2006/main">
               <a:ext uri="{FF2B5EF4-FFF2-40B4-BE49-F238E27FC236}">
-                <a16:creationId xmlns:a16="http://schemas.microsoft.com/office/drawing/2014/main" id="{2707CE2E-C769-4673-ADFF-2D9A6CF04424}"/>
+                <a16:creationId xmlns:a16="http://schemas.microsoft.com/office/drawing/2014/main" id="{17D7FC2D-D868-4EED-B009-34E25325ACC0}"/>
               </a:ext>
             </a:extLst>
           </p:cNvPr>
@@ -3190,7 +5038,18 @@
           <a:bodyPr xmlns:a="http://schemas.openxmlformats.org/drawingml/2006/main" anchor="ctr">
             <a:noAutofit/>
           </a:bodyPr>
-          <a:lstStyle xmlns:a="http://schemas.openxmlformats.org/drawingml/2006/main"/>
+          <a:lstStyle xmlns:a="http://schemas.openxmlformats.org/drawingml/2006/main">
+            <a:defPPr algn="l">
+              <a:defRPr sz="2700" b="1">
+                <a:solidFill>
+                  <a:srgbClr val="161616"/>
+                </a:solidFill>
+                <a:latin typeface="Arial"/>
+                <a:ea typeface="Arial"/>
+                <a:cs typeface="Arial"/>
+              </a:defRPr>
+            </a:defPPr>
+          </a:lstStyle>
           <a:p xmlns:a="http://schemas.openxmlformats.org/drawingml/2006/main">
             <a:pPr algn="l">
               <a:defRPr sz="2700" b="1">
@@ -3218,20 +5077,26 @@
       </p:sp>
       <p:pic>
         <p:nvPicPr>
-          <p:cNvPr id="4" name=""/>
+          <p:cNvPr id="2" name="">
+            <a:extLst xmlns:a="http://schemas.openxmlformats.org/drawingml/2006/main">
+              <a:ext uri="{FF2B5EF4-FFF2-40B4-BE49-F238E27FC236}">
+                <a16:creationId xmlns:a16="http://schemas.microsoft.com/office/drawing/2014/main" id="{E7722F9A-AA9C-47C8-8F3A-585F150B9983}"/>
+              </a:ext>
+            </a:extLst>
+          </p:cNvPr>
           <p:cNvPicPr>
             <a:picLocks xmlns:a="http://schemas.openxmlformats.org/drawingml/2006/main" noChangeAspect="1"/>
           </p:cNvPicPr>
           <p:nvPr/>
         </p:nvPicPr>
         <p:blipFill>
-          <a:blip xmlns:r="http://schemas.openxmlformats.org/officeDocument/2006/relationships" xmlns:a="http://schemas.openxmlformats.org/drawingml/2006/main" r:embed="Rb5a0918cca6241bc"/>
+          <a:blip xmlns:r="http://schemas.openxmlformats.org/officeDocument/2006/relationships" xmlns:a="http://schemas.openxmlformats.org/drawingml/2006/main" r:embed="R77bcdd1e62534c55"/>
           <a:stretch xmlns:a="http://schemas.openxmlformats.org/drawingml/2006/main"/>
         </p:blipFill>
         <p:spPr>
           <a:xfrm xmlns:a="http://schemas.openxmlformats.org/drawingml/2006/main">
-            <a:off x="1935417" y="1285875"/>
-            <a:ext cx="8321167" cy="5000625"/>
+            <a:off x="1241024" y="1285875"/>
+            <a:ext cx="9709951" cy="5000625"/>
           </a:xfrm>
           <a:prstGeom xmlns:a="http://schemas.openxmlformats.org/drawingml/2006/main" prst="rect">
             <a:avLst/>
@@ -3241,7 +5106,7 @@
     </p:spTree>
     <p:extLst>
       <p:ext uri="{BB962C8B-B14F-4D97-AF65-F5344CB8AC3E}">
-        <p14:creationId xmlns:p14="http://schemas.microsoft.com/office/powerpoint/2010/main" val="1376011665"/>
+        <p14:creationId xmlns:p14="http://schemas.microsoft.com/office/powerpoint/2010/main" val="1080235485"/>
       </p:ext>
     </p:extLst>
   </p:cSld>
@@ -3272,7 +5137,7 @@
           <p:cNvPr id="6" name="">
             <a:extLst xmlns:a="http://schemas.openxmlformats.org/drawingml/2006/main">
               <a:ext uri="{FF2B5EF4-FFF2-40B4-BE49-F238E27FC236}">
-                <a16:creationId xmlns:a16="http://schemas.microsoft.com/office/drawing/2014/main" id="{E049D8F5-FAC8-4D4D-A72A-2E2BBC8B9DEA}"/>
+                <a16:creationId xmlns:a16="http://schemas.microsoft.com/office/drawing/2014/main" id="{913527B5-B67E-4211-A586-887B5BF1C445}"/>
               </a:ext>
             </a:extLst>
           </p:cNvPr>
@@ -3298,7 +5163,18 @@
           <a:bodyPr xmlns:a="http://schemas.openxmlformats.org/drawingml/2006/main" anchor="ctr">
             <a:noAutofit/>
           </a:bodyPr>
-          <a:lstStyle xmlns:a="http://schemas.openxmlformats.org/drawingml/2006/main"/>
+          <a:lstStyle xmlns:a="http://schemas.openxmlformats.org/drawingml/2006/main">
+            <a:defPPr algn="l">
+              <a:defRPr sz="2700" b="1">
+                <a:solidFill>
+                  <a:srgbClr val="161616"/>
+                </a:solidFill>
+                <a:latin typeface="Arial"/>
+                <a:ea typeface="Arial"/>
+                <a:cs typeface="Arial"/>
+              </a:defRPr>
+            </a:defPPr>
+          </a:lstStyle>
           <a:p xmlns:a="http://schemas.openxmlformats.org/drawingml/2006/main">
             <a:pPr algn="l">
               <a:defRPr sz="2700" b="1">
@@ -3329,7 +5205,7 @@
           <p:cNvPr id="2" name="">
             <a:extLst xmlns:a="http://schemas.openxmlformats.org/drawingml/2006/main">
               <a:ext uri="{FF2B5EF4-FFF2-40B4-BE49-F238E27FC236}">
-                <a16:creationId xmlns:a16="http://schemas.microsoft.com/office/drawing/2014/main" id="{373BD44D-1613-4F67-A521-1B786A44C72B}"/>
+                <a16:creationId xmlns:a16="http://schemas.microsoft.com/office/drawing/2014/main" id="{7187E103-7F1C-480F-914E-22B46402CDFC}"/>
               </a:ext>
             </a:extLst>
           </p:cNvPr>
@@ -3355,7 +5231,18 @@
           <a:bodyPr xmlns:a="http://schemas.openxmlformats.org/drawingml/2006/main">
             <a:noAutofit/>
           </a:bodyPr>
-          <a:lstStyle xmlns:a="http://schemas.openxmlformats.org/drawingml/2006/main"/>
+          <a:lstStyle xmlns:a="http://schemas.openxmlformats.org/drawingml/2006/main">
+            <a:defPPr>
+              <a:defRPr sz="2175" b="0">
+                <a:solidFill>
+                  <a:srgbClr val="161616"/>
+                </a:solidFill>
+                <a:latin typeface="Arial"/>
+                <a:ea typeface="Arial"/>
+                <a:cs typeface="Arial"/>
+              </a:defRPr>
+            </a:defPPr>
+          </a:lstStyle>
           <a:p xmlns:a="http://schemas.openxmlformats.org/drawingml/2006/main">
             <a:pPr>
               <a:defRPr sz="2175" b="0">
@@ -3386,7 +5273,7 @@
           <p:cNvPr id="3" name="">
             <a:extLst xmlns:a="http://schemas.openxmlformats.org/drawingml/2006/main">
               <a:ext uri="{FF2B5EF4-FFF2-40B4-BE49-F238E27FC236}">
-                <a16:creationId xmlns:a16="http://schemas.microsoft.com/office/drawing/2014/main" id="{D9864804-8E3D-4D07-8D06-20273BC4A751}"/>
+                <a16:creationId xmlns:a16="http://schemas.microsoft.com/office/drawing/2014/main" id="{0EF2FB0A-C6D9-4744-ABAB-AE06F0E7A8F9}"/>
               </a:ext>
             </a:extLst>
           </p:cNvPr>
@@ -3412,7 +5299,18 @@
           <a:bodyPr xmlns:a="http://schemas.openxmlformats.org/drawingml/2006/main">
             <a:noAutofit/>
           </a:bodyPr>
-          <a:lstStyle xmlns:a="http://schemas.openxmlformats.org/drawingml/2006/main"/>
+          <a:lstStyle xmlns:a="http://schemas.openxmlformats.org/drawingml/2006/main">
+            <a:defPPr>
+              <a:defRPr sz="2175" b="0">
+                <a:solidFill>
+                  <a:srgbClr val="161616"/>
+                </a:solidFill>
+                <a:latin typeface="Arial"/>
+                <a:ea typeface="Arial"/>
+                <a:cs typeface="Arial"/>
+              </a:defRPr>
+            </a:defPPr>
+          </a:lstStyle>
           <a:p xmlns:a="http://schemas.openxmlformats.org/drawingml/2006/main">
             <a:pPr>
               <a:defRPr sz="2175" b="0">
@@ -3443,7 +5341,7 @@
           <p:cNvPr id="4" name="">
             <a:extLst xmlns:a="http://schemas.openxmlformats.org/drawingml/2006/main">
               <a:ext uri="{FF2B5EF4-FFF2-40B4-BE49-F238E27FC236}">
-                <a16:creationId xmlns:a16="http://schemas.microsoft.com/office/drawing/2014/main" id="{859A0FBA-D5E7-4B82-82FD-567132A0379E}"/>
+                <a16:creationId xmlns:a16="http://schemas.microsoft.com/office/drawing/2014/main" id="{28005D15-B7F6-4951-A81D-630EA948CBEC}"/>
               </a:ext>
             </a:extLst>
           </p:cNvPr>
@@ -3469,7 +5367,18 @@
           <a:bodyPr xmlns:a="http://schemas.openxmlformats.org/drawingml/2006/main">
             <a:noAutofit/>
           </a:bodyPr>
-          <a:lstStyle xmlns:a="http://schemas.openxmlformats.org/drawingml/2006/main"/>
+          <a:lstStyle xmlns:a="http://schemas.openxmlformats.org/drawingml/2006/main">
+            <a:defPPr>
+              <a:defRPr sz="2175" b="0">
+                <a:solidFill>
+                  <a:srgbClr val="161616"/>
+                </a:solidFill>
+                <a:latin typeface="Arial"/>
+                <a:ea typeface="Arial"/>
+                <a:cs typeface="Arial"/>
+              </a:defRPr>
+            </a:defPPr>
+          </a:lstStyle>
           <a:p xmlns:a="http://schemas.openxmlformats.org/drawingml/2006/main">
             <a:pPr>
               <a:defRPr sz="2175" b="0">
@@ -3500,7 +5409,7 @@
           <p:cNvPr id="5" name="">
             <a:extLst xmlns:a="http://schemas.openxmlformats.org/drawingml/2006/main">
               <a:ext uri="{FF2B5EF4-FFF2-40B4-BE49-F238E27FC236}">
-                <a16:creationId xmlns:a16="http://schemas.microsoft.com/office/drawing/2014/main" id="{C8B0CCD3-0F34-4AC9-8669-56470CC0E448}"/>
+                <a16:creationId xmlns:a16="http://schemas.microsoft.com/office/drawing/2014/main" id="{737D3C00-DF50-4AC1-8DC3-5B39E538FCF6}"/>
               </a:ext>
             </a:extLst>
           </p:cNvPr>
@@ -3526,7 +5435,18 @@
           <a:bodyPr xmlns:a="http://schemas.openxmlformats.org/drawingml/2006/main">
             <a:noAutofit/>
           </a:bodyPr>
-          <a:lstStyle xmlns:a="http://schemas.openxmlformats.org/drawingml/2006/main"/>
+          <a:lstStyle xmlns:a="http://schemas.openxmlformats.org/drawingml/2006/main">
+            <a:defPPr>
+              <a:defRPr sz="2175" b="0">
+                <a:solidFill>
+                  <a:srgbClr val="161616"/>
+                </a:solidFill>
+                <a:latin typeface="Arial"/>
+                <a:ea typeface="Arial"/>
+                <a:cs typeface="Arial"/>
+              </a:defRPr>
+            </a:defPPr>
+          </a:lstStyle>
           <a:p xmlns:a="http://schemas.openxmlformats.org/drawingml/2006/main">
             <a:pPr>
               <a:defRPr sz="2175" b="0">
@@ -3555,7 +5475,7 @@
     </p:spTree>
     <p:extLst>
       <p:ext uri="{BB962C8B-B14F-4D97-AF65-F5344CB8AC3E}">
-        <p14:creationId xmlns:p14="http://schemas.microsoft.com/office/powerpoint/2010/main" val="2105855199"/>
+        <p14:creationId xmlns:p14="http://schemas.microsoft.com/office/powerpoint/2010/main" val="254039403"/>
       </p:ext>
     </p:extLst>
   </p:cSld>
@@ -3603,16 +5523,16 @@
         <a:srgbClr val="96607D"/>
       </a:folHlink>
     </a:clrScheme>
-    <a:fontScheme name="Office">
+    <a:fontScheme name="">
       <a:majorFont>
-        <a:latin typeface="Calibri Light"/>
-        <a:ea typeface="Calibri Light"/>
-        <a:cs typeface="Calibri Light"/>
+        <a:latin typeface="Aptos"/>
+        <a:ea typeface=""/>
+        <a:cs typeface=""/>
       </a:majorFont>
       <a:minorFont>
-        <a:latin typeface="Calibri"/>
-        <a:ea typeface="Calibri"/>
-        <a:cs typeface="Calibri"/>
+        <a:latin typeface="Aptos"/>
+        <a:ea typeface=""/>
+        <a:cs typeface=""/>
       </a:minorFont>
     </a:fontScheme>
     <a:fmtScheme name="ChatGPT">
